--- a/bai_tap_cuoi_khoa/bao_cao/SLIDE_THUYET_TRINH_v6.pptx
+++ b/bai_tap_cuoi_khoa/bao_cao/SLIDE_THUYET_TRINH_v6.pptx
@@ -4538,9 +4538,10 @@
             <a:tbl>
               <a:tblPr/>
               <a:tblGrid>
-                <a:gridCol w="2834640"/>
-                <a:gridCol w="5120640"/>
-                <a:gridCol w="3108960"/>
+                <a:gridCol w="2148840"/>
+                <a:gridCol w="3703320"/>
+                <a:gridCol w="3017520"/>
+                <a:gridCol w="2194560"/>
               </a:tblGrid>
               <a:tr h="457200">
                 <a:tc>
@@ -4561,6 +4562,74 @@
                           <a:cs typeface="Calibri" panose="020F0502020204030204" pitchFamily="34" charset="-120"/>
                         </a:rPr>
                         <a:t>Đặc trưng mới</a:t>
+                      </a:r>
+                      <a:endParaRPr lang="en-US" sz="1250" dirty="0">
+                        <a:latin typeface="Calibri" panose="020F0502020204030204" pitchFamily="34" charset="0"/>
+                        <a:ea typeface="Calibri" panose="020F0502020204030204" pitchFamily="34" charset="0"/>
+                        <a:cs typeface="Calibri" panose="020F0502020204030204" pitchFamily="34" charset="0"/>
+                      </a:endParaRPr>
+                    </a:p>
+                  </a:txBody>
+                  <a:tcPr marL="50800" marR="50800" marT="25400" marB="25400" anchor="ctr">
+                    <a:lnL w="12700" cap="flat" cmpd="sng" algn="ctr">
+                      <a:solidFill>
+                        <a:srgbClr val="D6DFE7"/>
+                      </a:solidFill>
+                      <a:prstDash val="solid"/>
+                      <a:round/>
+                      <a:headEnd type="none" w="med" len="med"/>
+                      <a:tailEnd type="none" w="med" len="med"/>
+                    </a:lnL>
+                    <a:lnR w="12700" cap="flat" cmpd="sng" algn="ctr">
+                      <a:solidFill>
+                        <a:srgbClr val="D6DFE7"/>
+                      </a:solidFill>
+                      <a:prstDash val="solid"/>
+                      <a:round/>
+                      <a:headEnd type="none" w="med" len="med"/>
+                      <a:tailEnd type="none" w="med" len="med"/>
+                    </a:lnR>
+                    <a:lnT w="12700" cap="flat" cmpd="sng" algn="ctr">
+                      <a:solidFill>
+                        <a:srgbClr val="D6DFE7"/>
+                      </a:solidFill>
+                      <a:prstDash val="solid"/>
+                      <a:round/>
+                      <a:headEnd type="none" w="med" len="med"/>
+                      <a:tailEnd type="none" w="med" len="med"/>
+                    </a:lnT>
+                    <a:lnB w="12700" cap="flat" cmpd="sng" algn="ctr">
+                      <a:solidFill>
+                        <a:srgbClr val="D6DFE7"/>
+                      </a:solidFill>
+                      <a:prstDash val="solid"/>
+                      <a:round/>
+                      <a:headEnd type="none" w="med" len="med"/>
+                      <a:tailEnd type="none" w="med" len="med"/>
+                    </a:lnB>
+                    <a:solidFill>
+                      <a:srgbClr val="16283A"/>
+                    </a:solidFill>
+                  </a:tcPr>
+                </a:tc>
+                <a:tc>
+                  <a:txBody>
+                    <a:bodyPr/>
+                    <a:lstStyle/>
+                    <a:p>
+                      <a:pPr marL="0" indent="0" algn="ctr">
+                        <a:buNone/>
+                      </a:pPr>
+                      <a:r>
+                        <a:rPr lang="en-US" sz="1250" b="1" dirty="0">
+                          <a:solidFill>
+                            <a:srgbClr val="FFFFFF"/>
+                          </a:solidFill>
+                          <a:latin typeface="Calibri" panose="020F0502020204030204" pitchFamily="34" charset="0"/>
+                          <a:ea typeface="Calibri" panose="020F0502020204030204" pitchFamily="34" charset="-122"/>
+                          <a:cs typeface="Calibri" panose="020F0502020204030204" pitchFamily="34" charset="-120"/>
+                        </a:rPr>
+                        <a:t>Công thức</a:t>
                       </a:r>
                       <a:endParaRPr lang="en-US" sz="1250" dirty="0">
                         <a:latin typeface="Calibri" panose="020F0502020204030204" pitchFamily="34" charset="0"/>
@@ -4826,7 +4895,75 @@
                         <a:buNone/>
                       </a:pPr>
                       <a:r>
-                        <a:rPr lang="en-US" sz="1300" dirty="0">
+                        <a:rPr lang="en-US" sz="1100" dirty="0">
+                          <a:solidFill>
+                            <a:srgbClr val="1B2733"/>
+                          </a:solidFill>
+                          <a:latin typeface="Calibri" panose="020F0502020204030204" pitchFamily="34" charset="0"/>
+                          <a:ea typeface="Calibri" panose="020F0502020204030204" pitchFamily="34" charset="-122"/>
+                          <a:cs typeface="Calibri" panose="020F0502020204030204" pitchFamily="34" charset="-120"/>
+                        </a:rPr>
+                        <a:t>max(8,6 − ΔT, 0) × max(1380 − tốc, 0)</a:t>
+                      </a:r>
+                      <a:endParaRPr lang="en-US" sz="1300" dirty="0">
+                        <a:latin typeface="Calibri" panose="020F0502020204030204" pitchFamily="34" charset="0"/>
+                        <a:ea typeface="Calibri" panose="020F0502020204030204" pitchFamily="34" charset="0"/>
+                        <a:cs typeface="Calibri" panose="020F0502020204030204" pitchFamily="34" charset="0"/>
+                      </a:endParaRPr>
+                    </a:p>
+                  </a:txBody>
+                  <a:tcPr marL="50800" marR="50800" marT="25400" marB="25400" anchor="ctr">
+                    <a:lnL w="12700" cap="flat" cmpd="sng" algn="ctr">
+                      <a:solidFill>
+                        <a:srgbClr val="D6DFE7"/>
+                      </a:solidFill>
+                      <a:prstDash val="solid"/>
+                      <a:round/>
+                      <a:headEnd type="none" w="med" len="med"/>
+                      <a:tailEnd type="none" w="med" len="med"/>
+                    </a:lnL>
+                    <a:lnR w="12700" cap="flat" cmpd="sng" algn="ctr">
+                      <a:solidFill>
+                        <a:srgbClr val="D6DFE7"/>
+                      </a:solidFill>
+                      <a:prstDash val="solid"/>
+                      <a:round/>
+                      <a:headEnd type="none" w="med" len="med"/>
+                      <a:tailEnd type="none" w="med" len="med"/>
+                    </a:lnR>
+                    <a:lnT w="12700" cap="flat" cmpd="sng" algn="ctr">
+                      <a:solidFill>
+                        <a:srgbClr val="D6DFE7"/>
+                      </a:solidFill>
+                      <a:prstDash val="solid"/>
+                      <a:round/>
+                      <a:headEnd type="none" w="med" len="med"/>
+                      <a:tailEnd type="none" w="med" len="med"/>
+                    </a:lnT>
+                    <a:lnB w="12700" cap="flat" cmpd="sng" algn="ctr">
+                      <a:solidFill>
+                        <a:srgbClr val="D6DFE7"/>
+                      </a:solidFill>
+                      <a:prstDash val="solid"/>
+                      <a:round/>
+                      <a:headEnd type="none" w="med" len="med"/>
+                      <a:tailEnd type="none" w="med" len="med"/>
+                    </a:lnB>
+                    <a:solidFill>
+                      <a:srgbClr val="FFFFFF"/>
+                    </a:solidFill>
+                  </a:tcPr>
+                </a:tc>
+                <a:tc>
+                  <a:txBody>
+                    <a:bodyPr/>
+                    <a:lstStyle/>
+                    <a:p>
+                      <a:pPr marL="0" indent="0" algn="ctr">
+                        <a:buNone/>
+                      </a:pPr>
+                      <a:r>
+                        <a:rPr lang="en-US" sz="1100" dirty="0">
                           <a:solidFill>
                             <a:srgbClr val="1B2733"/>
                           </a:solidFill>
@@ -5032,7 +5169,75 @@
                         <a:buNone/>
                       </a:pPr>
                       <a:r>
-                        <a:rPr lang="en-US" sz="1300" dirty="0">
+                        <a:rPr lang="en-US" sz="1100" dirty="0">
+                          <a:solidFill>
+                            <a:srgbClr val="1B2733"/>
+                          </a:solidFill>
+                          <a:latin typeface="Calibri" panose="020F0502020204030204" pitchFamily="34" charset="0"/>
+                          <a:ea typeface="Calibri" panose="020F0502020204030204" pitchFamily="34" charset="-122"/>
+                          <a:cs typeface="Calibri" panose="020F0502020204030204" pitchFamily="34" charset="-120"/>
+                        </a:rPr>
+                        <a:t>max(3500 − P, 0) + max(P − 9000, 0)</a:t>
+                      </a:r>
+                      <a:endParaRPr lang="en-US" sz="1300" dirty="0">
+                        <a:latin typeface="Calibri" panose="020F0502020204030204" pitchFamily="34" charset="0"/>
+                        <a:ea typeface="Calibri" panose="020F0502020204030204" pitchFamily="34" charset="0"/>
+                        <a:cs typeface="Calibri" panose="020F0502020204030204" pitchFamily="34" charset="0"/>
+                      </a:endParaRPr>
+                    </a:p>
+                  </a:txBody>
+                  <a:tcPr marL="50800" marR="50800" marT="25400" marB="25400" anchor="ctr">
+                    <a:lnL w="12700" cap="flat" cmpd="sng" algn="ctr">
+                      <a:solidFill>
+                        <a:srgbClr val="D6DFE7"/>
+                      </a:solidFill>
+                      <a:prstDash val="solid"/>
+                      <a:round/>
+                      <a:headEnd type="none" w="med" len="med"/>
+                      <a:tailEnd type="none" w="med" len="med"/>
+                    </a:lnL>
+                    <a:lnR w="12700" cap="flat" cmpd="sng" algn="ctr">
+                      <a:solidFill>
+                        <a:srgbClr val="D6DFE7"/>
+                      </a:solidFill>
+                      <a:prstDash val="solid"/>
+                      <a:round/>
+                      <a:headEnd type="none" w="med" len="med"/>
+                      <a:tailEnd type="none" w="med" len="med"/>
+                    </a:lnR>
+                    <a:lnT w="12700" cap="flat" cmpd="sng" algn="ctr">
+                      <a:solidFill>
+                        <a:srgbClr val="D6DFE7"/>
+                      </a:solidFill>
+                      <a:prstDash val="solid"/>
+                      <a:round/>
+                      <a:headEnd type="none" w="med" len="med"/>
+                      <a:tailEnd type="none" w="med" len="med"/>
+                    </a:lnT>
+                    <a:lnB w="12700" cap="flat" cmpd="sng" algn="ctr">
+                      <a:solidFill>
+                        <a:srgbClr val="D6DFE7"/>
+                      </a:solidFill>
+                      <a:prstDash val="solid"/>
+                      <a:round/>
+                      <a:headEnd type="none" w="med" len="med"/>
+                      <a:tailEnd type="none" w="med" len="med"/>
+                    </a:lnB>
+                    <a:solidFill>
+                      <a:srgbClr val="F3F6F9"/>
+                    </a:solidFill>
+                  </a:tcPr>
+                </a:tc>
+                <a:tc>
+                  <a:txBody>
+                    <a:bodyPr/>
+                    <a:lstStyle/>
+                    <a:p>
+                      <a:pPr marL="0" indent="0" algn="ctr">
+                        <a:buNone/>
+                      </a:pPr>
+                      <a:r>
+                        <a:rPr lang="en-US" sz="1100" dirty="0">
                           <a:solidFill>
                             <a:srgbClr val="1B2733"/>
                           </a:solidFill>
@@ -5238,7 +5443,75 @@
                         <a:buNone/>
                       </a:pPr>
                       <a:r>
-                        <a:rPr lang="en-US" sz="1300" dirty="0">
+                        <a:rPr lang="en-US" sz="1100" dirty="0">
+                          <a:solidFill>
+                            <a:srgbClr val="1B2733"/>
+                          </a:solidFill>
+                          <a:latin typeface="Calibri" panose="020F0502020204030204" pitchFamily="34" charset="0"/>
+                          <a:ea typeface="Calibri" panose="020F0502020204030204" pitchFamily="34" charset="-122"/>
+                          <a:cs typeface="Calibri" panose="020F0502020204030204" pitchFamily="34" charset="-120"/>
+                        </a:rPr>
+                        <a:t>mòn × mômen − ngưỡng(loại SP)</a:t>
+                      </a:r>
+                      <a:endParaRPr lang="en-US" sz="1300" dirty="0">
+                        <a:latin typeface="Calibri" panose="020F0502020204030204" pitchFamily="34" charset="0"/>
+                        <a:ea typeface="Calibri" panose="020F0502020204030204" pitchFamily="34" charset="0"/>
+                        <a:cs typeface="Calibri" panose="020F0502020204030204" pitchFamily="34" charset="0"/>
+                      </a:endParaRPr>
+                    </a:p>
+                  </a:txBody>
+                  <a:tcPr marL="50800" marR="50800" marT="25400" marB="25400" anchor="ctr">
+                    <a:lnL w="12700" cap="flat" cmpd="sng" algn="ctr">
+                      <a:solidFill>
+                        <a:srgbClr val="D6DFE7"/>
+                      </a:solidFill>
+                      <a:prstDash val="solid"/>
+                      <a:round/>
+                      <a:headEnd type="none" w="med" len="med"/>
+                      <a:tailEnd type="none" w="med" len="med"/>
+                    </a:lnL>
+                    <a:lnR w="12700" cap="flat" cmpd="sng" algn="ctr">
+                      <a:solidFill>
+                        <a:srgbClr val="D6DFE7"/>
+                      </a:solidFill>
+                      <a:prstDash val="solid"/>
+                      <a:round/>
+                      <a:headEnd type="none" w="med" len="med"/>
+                      <a:tailEnd type="none" w="med" len="med"/>
+                    </a:lnR>
+                    <a:lnT w="12700" cap="flat" cmpd="sng" algn="ctr">
+                      <a:solidFill>
+                        <a:srgbClr val="D6DFE7"/>
+                      </a:solidFill>
+                      <a:prstDash val="solid"/>
+                      <a:round/>
+                      <a:headEnd type="none" w="med" len="med"/>
+                      <a:tailEnd type="none" w="med" len="med"/>
+                    </a:lnT>
+                    <a:lnB w="12700" cap="flat" cmpd="sng" algn="ctr">
+                      <a:solidFill>
+                        <a:srgbClr val="D6DFE7"/>
+                      </a:solidFill>
+                      <a:prstDash val="solid"/>
+                      <a:round/>
+                      <a:headEnd type="none" w="med" len="med"/>
+                      <a:tailEnd type="none" w="med" len="med"/>
+                    </a:lnB>
+                    <a:solidFill>
+                      <a:srgbClr val="FFFFFF"/>
+                    </a:solidFill>
+                  </a:tcPr>
+                </a:tc>
+                <a:tc>
+                  <a:txBody>
+                    <a:bodyPr/>
+                    <a:lstStyle/>
+                    <a:p>
+                      <a:pPr marL="0" indent="0" algn="ctr">
+                        <a:buNone/>
+                      </a:pPr>
+                      <a:r>
+                        <a:rPr lang="en-US" sz="1100" dirty="0">
                           <a:solidFill>
                             <a:srgbClr val="1B2733"/>
                           </a:solidFill>
@@ -5378,7 +5651,7 @@
         </p:nvSpPr>
         <p:spPr>
           <a:xfrm>
-            <a:off x="575945" y="3772535"/>
+            <a:off x="575945" y="4069080"/>
             <a:ext cx="11064240" cy="1010920"/>
           </a:xfrm>
           <a:prstGeom prst="rect">
@@ -5451,6 +5724,39 @@
               <a:t>Cả 3 tương quan với hỏng mạnh ngang/hơn độ mòn dao → không phải thêm cho có.</a:t>
             </a:r>
             <a:endParaRPr lang="en-US" sz="1450" dirty="0"/>
+          </a:p>
+        </p:txBody>
+      </p:sp>
+      <p:sp>
+        <p:nvSpPr>
+          <p:cNvPr id="14" name="TextBox 13"/>
+          <p:cNvSpPr txBox="1"/>
+          <p:nvPr/>
+        </p:nvSpPr>
+        <p:spPr>
+          <a:xfrm>
+            <a:off x="576072" y="5212080"/>
+            <a:ext cx="11064240" cy="502920"/>
+          </a:xfrm>
+          <a:prstGeom prst="rect">
+            <a:avLst/>
+          </a:prstGeom>
+          <a:noFill/>
+        </p:spPr>
+        <p:txBody>
+          <a:bodyPr wrap="square">
+            <a:spAutoFit/>
+          </a:bodyPr>
+          <a:lstStyle/>
+          <a:p>
+            <a:r>
+              <a:rPr sz="1150" i="1">
+                <a:solidFill>
+                  <a:srgbClr val="333333"/>
+                </a:solidFill>
+              </a:rPr>
+              <a:t>Ghi chú: ΔT = nhiệt độ máy − nhiệt độ môi trường (K);  P (công suất cơ) = mômen × tốc độ × 2π/60 (W).  Hàm max(·,0) = "bản lề": chỉ bật khi máy đi vào vùng nguy.</a:t>
+            </a:r>
           </a:p>
         </p:txBody>
       </p:sp>
@@ -7632,6 +7938,10 @@
             <a:srgbClr val="C4444E"/>
           </a:solidFill>
         </p:spPr>
+        <p:txBody>
+          <a:bodyPr/>
+          <a:p/>
+        </p:txBody>
       </p:sp>
       <p:sp>
         <p:nvSpPr>
@@ -7720,6 +8030,10 @@
             <a:srgbClr val="2E8B57"/>
           </a:solidFill>
         </p:spPr>
+        <p:txBody>
+          <a:bodyPr/>
+          <a:p/>
+        </p:txBody>
       </p:sp>
       <p:sp>
         <p:nvSpPr>
@@ -7788,59 +8102,30 @@
           </a:p>
         </p:txBody>
       </p:sp>
-      <p:sp>
-        <p:nvSpPr>
-          <p:cNvPr id="10" name="TextBox 9"/>
-          <p:cNvSpPr txBox="1"/>
+      <p:pic>
+        <p:nvPicPr>
+          <p:cNvPr id="10" name="Picture 9" descr="10_drift_importance.png"/>
+          <p:cNvPicPr>
+            <a:picLocks noChangeAspect="1"/>
+          </p:cNvPicPr>
           <p:nvPr/>
-        </p:nvSpPr>
+        </p:nvPicPr>
+        <p:blipFill>
+          <a:blip r:embed="rId3"/>
+          <a:stretch>
+            <a:fillRect/>
+          </a:stretch>
+        </p:blipFill>
         <p:spPr>
           <a:xfrm>
-            <a:off x="566928" y="5257800"/>
-            <a:ext cx="6675120" cy="1234440"/>
+            <a:off x="566928" y="5138928"/>
+            <a:ext cx="6675120" cy="1474736"/>
           </a:xfrm>
           <a:prstGeom prst="rect">
             <a:avLst/>
           </a:prstGeom>
-          <a:noFill/>
         </p:spPr>
-        <p:txBody>
-          <a:bodyPr wrap="square">
-            <a:spAutoFit/>
-          </a:bodyPr>
-          <a:lstStyle/>
-          <a:p>
-            <a:r>
-              <a:rPr b="1" sz="1300">
-                <a:solidFill>
-                  <a:srgbClr val="14243D"/>
-                </a:solidFill>
-              </a:rPr>
-              <a:t>Feature importance (mô hình đoán A/B):</a:t>
-            </a:r>
-          </a:p>
-          <a:p>
-            <a:r>
-              <a:rPr sz="1250">
-                <a:solidFill>
-                  <a:srgbClr val="222222"/>
-                </a:solidFill>
-              </a:rPr>
-              <a:t>nhiệt độ MT 33%  ·  nhiệt độ máy 21%  ·  tốc độ 16%  ·  lực xoắn 16%  ·  độ mòn dao 14%</a:t>
-            </a:r>
-          </a:p>
-          <a:p>
-            <a:r>
-              <a:rPr sz="1250" i="1">
-                <a:solidFill>
-                  <a:srgbClr val="B01A1A"/>
-                </a:solidFill>
-              </a:rPr>
-              <a:t>⇒ 2 biến nhiệt độ chiếm ~54% → thủ phạm chính gây shift.</a:t>
-            </a:r>
-          </a:p>
-        </p:txBody>
-      </p:sp>
+      </p:pic>
     </p:spTree>
   </p:cSld>
   <p:clrMapOvr>
@@ -23038,6 +23323,10 @@
             <a:prstDash val="solid"/>
           </a:ln>
         </p:spPr>
+        <p:txBody>
+          <a:bodyPr/>
+          <a:p/>
+        </p:txBody>
       </p:sp>
       <p:sp>
         <p:nvSpPr>
@@ -23047,8 +23336,8 @@
         </p:nvSpPr>
         <p:spPr>
           <a:xfrm>
-            <a:off x="731520" y="1847088"/>
-            <a:ext cx="5157216" cy="3712464"/>
+            <a:off x="731520" y="1810512"/>
+            <a:ext cx="5157216" cy="1874519"/>
           </a:xfrm>
           <a:prstGeom prst="rect">
             <a:avLst/>
@@ -23066,7 +23355,7 @@
               <a:buNone/>
             </a:pPr>
             <a:r>
-              <a:rPr lang="en-US" sz="1500" b="1" dirty="0">
+              <a:rPr lang="en-US" sz="1250" b="1" dirty="0">
                 <a:solidFill>
                   <a:srgbClr val="16283A"/>
                 </a:solidFill>
@@ -23086,7 +23375,7 @@
               <a:buNone/>
             </a:pPr>
             <a:r>
-              <a:rPr lang="en-US" sz="1350" dirty="0">
+              <a:rPr lang="en-US" sz="1250" dirty="0">
                 <a:solidFill>
                   <a:srgbClr val="1B2733"/>
                 </a:solidFill>
@@ -23094,7 +23383,7 @@
                 <a:ea typeface="Calibri" panose="020F0502020204030204" pitchFamily="34" charset="-122"/>
                 <a:cs typeface="Calibri" panose="020F0502020204030204" pitchFamily="34" charset="-120"/>
               </a:rPr>
-              <a:t>• Độ mòn dao rõ nhất: máy hỏng mòn ~177 phút, máy lành ~123.</a:t>
+              <a:t>• Độ mòn dao rõ nhất: máy hỏng ~177 vs lành ~123 → dồn mức mòn CAO.</a:t>
             </a:r>
             <a:endParaRPr lang="en-US" sz="1500" dirty="0"/>
           </a:p>
@@ -23106,7 +23395,7 @@
               <a:buNone/>
             </a:pPr>
             <a:r>
-              <a:rPr lang="en-US" sz="1350" dirty="0">
+              <a:rPr lang="en-US" sz="1250" dirty="0">
                 <a:solidFill>
                   <a:srgbClr val="1B2733"/>
                 </a:solidFill>
@@ -23114,7 +23403,7 @@
                 <a:ea typeface="Calibri" panose="020F0502020204030204" pitchFamily="34" charset="-122"/>
                 <a:cs typeface="Calibri" panose="020F0502020204030204" pitchFamily="34" charset="-120"/>
               </a:rPr>
-              <a:t>• Các số đo khác nhìn riêng gần như không tách được…</a:t>
+              <a:t>• Biến khác tương quan tuyến tính ≈ 0 nhưng KHÔNG vô dụng:</a:t>
             </a:r>
             <a:endParaRPr lang="en-US" sz="1500" dirty="0"/>
           </a:p>
@@ -23126,7 +23415,7 @@
               <a:buNone/>
             </a:pPr>
             <a:r>
-              <a:rPr lang="en-US" sz="1350" dirty="0">
+              <a:rPr lang="en-US" sz="1250" dirty="0">
                 <a:solidFill>
                   <a:srgbClr val="C4444E"/>
                 </a:solidFill>
@@ -23134,7 +23423,7 @@
                 <a:ea typeface="Calibri" panose="020F0502020204030204" pitchFamily="34" charset="-122"/>
                 <a:cs typeface="Calibri" panose="020F0502020204030204" pitchFamily="34" charset="-120"/>
               </a:rPr>
-              <a:t>• …nhưng tốc độ / lực xoắn của máy hỏng dồn về HAI ĐẦU (rất cao HOẶC rất thấp) → quá tải / thiếu tải.</a:t>
+              <a:t>• Tốc độ quay dồn đuôi THẤP; mômen xoắn dồn CẢ HAI ĐẦU → quá/thiếu tải.</a:t>
             </a:r>
             <a:endParaRPr lang="en-US" sz="1500" dirty="0"/>
           </a:p>
@@ -23143,7 +23432,7 @@
               <a:buNone/>
             </a:pPr>
             <a:r>
-              <a:rPr lang="en-US" sz="1300" b="1" dirty="0">
+              <a:rPr lang="en-US" sz="1250" b="1" dirty="0">
                 <a:solidFill>
                   <a:srgbClr val="16283A"/>
                 </a:solidFill>
@@ -23183,6 +23472,10 @@
             <a:prstDash val="solid"/>
           </a:ln>
         </p:spPr>
+        <p:txBody>
+          <a:bodyPr/>
+          <a:p/>
+        </p:txBody>
       </p:sp>
       <p:pic>
         <p:nvPicPr>
@@ -23272,6 +23565,10 @@
             <a:prstDash val="solid"/>
           </a:ln>
         </p:spPr>
+        <p:txBody>
+          <a:bodyPr/>
+          <a:p/>
+        </p:txBody>
       </p:sp>
       <p:sp>
         <p:nvSpPr>
@@ -23322,6 +23619,30 @@
           </a:p>
         </p:txBody>
       </p:sp>
+      <p:pic>
+        <p:nvPicPr>
+          <p:cNvPr id="12" name="Picture 11" descr="09_density_by_label.png"/>
+          <p:cNvPicPr>
+            <a:picLocks noChangeAspect="1"/>
+          </p:cNvPicPr>
+          <p:nvPr/>
+        </p:nvPicPr>
+        <p:blipFill>
+          <a:blip r:embed="rId4"/>
+          <a:stretch>
+            <a:fillRect/>
+          </a:stretch>
+        </p:blipFill>
+        <p:spPr>
+          <a:xfrm>
+            <a:off x="658368" y="3840480"/>
+            <a:ext cx="5257800" cy="1629390"/>
+          </a:xfrm>
+          <a:prstGeom prst="rect">
+            <a:avLst/>
+          </a:prstGeom>
+        </p:spPr>
+      </p:pic>
     </p:spTree>
   </p:cSld>
   <p:clrMapOvr>

--- a/bai_tap_cuoi_khoa/bao_cao/SLIDE_THUYET_TRINH_v6.pptx
+++ b/bai_tap_cuoi_khoa/bao_cao/SLIDE_THUYET_TRINH_v6.pptx
@@ -3455,6 +3455,10 @@
             <a:srgbClr val="16283A"/>
           </a:solidFill>
         </p:spPr>
+        <p:txBody>
+          <a:bodyPr/>
+          <a:p/>
+        </p:txBody>
       </p:sp>
       <p:sp>
         <p:nvSpPr>
@@ -3595,41 +3599,14 @@
       </p:sp>
       <p:sp>
         <p:nvSpPr>
-          <p:cNvPr id="6" name="Shape 4"/>
+          <p:cNvPr id="18" name="Text 16"/>
           <p:cNvSpPr/>
           <p:nvPr/>
         </p:nvSpPr>
         <p:spPr>
           <a:xfrm>
-            <a:off x="731520" y="3977640"/>
-            <a:ext cx="2514600" cy="1371600"/>
-          </a:xfrm>
-          <a:prstGeom prst="roundRect">
-            <a:avLst>
-              <a:gd name="adj" fmla="val 6667"/>
-            </a:avLst>
-          </a:prstGeom>
-          <a:solidFill>
-            <a:srgbClr val="22384E"/>
-          </a:solidFill>
-          <a:ln w="12700">
-            <a:solidFill>
-              <a:srgbClr val="33506B"/>
-            </a:solidFill>
-            <a:prstDash val="solid"/>
-          </a:ln>
-        </p:spPr>
-      </p:sp>
-      <p:sp>
-        <p:nvSpPr>
-          <p:cNvPr id="7" name="Text 5"/>
-          <p:cNvSpPr/>
-          <p:nvPr/>
-        </p:nvSpPr>
-        <p:spPr>
-          <a:xfrm>
-            <a:off x="731520" y="4087368"/>
-            <a:ext cx="2514600" cy="685800"/>
+            <a:off x="731520" y="3675887"/>
+            <a:ext cx="10725912" cy="2395728"/>
           </a:xfrm>
           <a:prstGeom prst="rect">
             <a:avLst/>
@@ -3641,394 +3618,146 @@
           <a:lstStyle/>
           <a:p>
             <a:pPr marL="0" indent="0" algn="ctr">
+              <a:spcAft>
+                <a:spcPts val="900"/>
+              </a:spcAft>
               <a:buNone/>
             </a:pPr>
             <a:r>
-              <a:rPr lang="en-US" sz="3200" b="1" dirty="0">
+              <a:rPr sz="1300" b="1">
                 <a:solidFill>
                   <a:srgbClr val="F2A104"/>
                 </a:solidFill>
-                <a:latin typeface="Cambria" panose="02040503050406030204" pitchFamily="34" charset="0"/>
-                <a:ea typeface="Cambria" panose="02040503050406030204" pitchFamily="34" charset="-122"/>
-                <a:cs typeface="Cambria" panose="02040503050406030204" pitchFamily="34" charset="-120"/>
+                <a:latin typeface="Calibri"/>
               </a:rPr>
-              <a:t>0.781</a:t>
-            </a:r>
-            <a:endParaRPr lang="en-US" sz="3200" dirty="0"/>
-          </a:p>
-        </p:txBody>
-      </p:sp>
-      <p:sp>
-        <p:nvSpPr>
-          <p:cNvPr id="8" name="Text 6"/>
-          <p:cNvSpPr/>
-          <p:nvPr/>
-        </p:nvSpPr>
-        <p:spPr>
-          <a:xfrm>
-            <a:off x="822960" y="4800600"/>
-            <a:ext cx="2331720" cy="457200"/>
-          </a:xfrm>
-          <a:prstGeom prst="rect">
-            <a:avLst/>
-          </a:prstGeom>
-          <a:noFill/>
-        </p:spPr>
-        <p:txBody>
-          <a:bodyPr wrap="square" lIns="0" tIns="0" rIns="0" bIns="0" rtlCol="0" anchor="ctr"/>
-          <a:lstStyle/>
-          <a:p>
-            <a:pPr marL="0" indent="0" algn="ctr">
-              <a:buNone/>
+              <a:t>NHÓM THỰC HIỆN</a:t>
+            </a:r>
+            <a:endParaRPr lang="en-US" sz="1300" dirty="0"/>
+          </a:p>
+          <a:p>
+            <a:pPr algn="ctr">
+              <a:spcAft>
+                <a:spcPts val="300"/>
+              </a:spcAft>
             </a:pPr>
             <a:r>
-              <a:rPr lang="en-US" sz="1150" dirty="0">
+              <a:rPr sz="1350" b="0">
+                <a:solidFill>
+                  <a:srgbClr val="F2A104"/>
+                </a:solidFill>
+                <a:latin typeface="Calibri"/>
+              </a:rPr>
+              <a:t>25MS23315   ·   </a:t>
+            </a:r>
+            <a:r>
+              <a:rPr sz="1350" b="0">
+                <a:solidFill>
+                  <a:srgbClr val="FFFFFF"/>
+                </a:solidFill>
+                <a:latin typeface="Calibri"/>
+              </a:rPr>
+              <a:t>Trịnh Hữu Tuấn</a:t>
+            </a:r>
+          </a:p>
+          <a:p>
+            <a:pPr algn="ctr">
+              <a:spcAft>
+                <a:spcPts val="300"/>
+              </a:spcAft>
+            </a:pPr>
+            <a:r>
+              <a:rPr sz="1350" b="0">
+                <a:solidFill>
+                  <a:srgbClr val="F2A104"/>
+                </a:solidFill>
+                <a:latin typeface="Calibri"/>
+              </a:rPr>
+              <a:t>25MS23323   ·   </a:t>
+            </a:r>
+            <a:r>
+              <a:rPr sz="1350" b="0">
+                <a:solidFill>
+                  <a:srgbClr val="FFFFFF"/>
+                </a:solidFill>
+                <a:latin typeface="Calibri"/>
+              </a:rPr>
+              <a:t>Hoàng Phi Hải</a:t>
+            </a:r>
+          </a:p>
+          <a:p>
+            <a:pPr algn="ctr">
+              <a:spcAft>
+                <a:spcPts val="300"/>
+              </a:spcAft>
+            </a:pPr>
+            <a:r>
+              <a:rPr sz="1350" b="0">
+                <a:solidFill>
+                  <a:srgbClr val="F2A104"/>
+                </a:solidFill>
+                <a:latin typeface="Calibri"/>
+              </a:rPr>
+              <a:t>25MS23327   ·   </a:t>
+            </a:r>
+            <a:r>
+              <a:rPr sz="1350" b="0">
+                <a:solidFill>
+                  <a:srgbClr val="FFFFFF"/>
+                </a:solidFill>
+                <a:latin typeface="Calibri"/>
+              </a:rPr>
+              <a:t>Đỗ Hoàng Tỷ Phú</a:t>
+            </a:r>
+          </a:p>
+          <a:p>
+            <a:pPr algn="ctr">
+              <a:spcAft>
+                <a:spcPts val="300"/>
+              </a:spcAft>
+            </a:pPr>
+            <a:r>
+              <a:rPr sz="1350" b="0">
+                <a:solidFill>
+                  <a:srgbClr val="F2A104"/>
+                </a:solidFill>
+                <a:latin typeface="Calibri"/>
+              </a:rPr>
+              <a:t>25MS23328   ·   </a:t>
+            </a:r>
+            <a:r>
+              <a:rPr sz="1350" b="0">
+                <a:solidFill>
+                  <a:srgbClr val="FFFFFF"/>
+                </a:solidFill>
+                <a:latin typeface="Calibri"/>
+              </a:rPr>
+              <a:t>Lê Lâm Vĩnh</a:t>
+            </a:r>
+          </a:p>
+          <a:p>
+            <a:pPr algn="ctr">
+              <a:spcBef>
+                <a:spcPts val="1100"/>
+              </a:spcBef>
+            </a:pPr>
+            <a:r>
+              <a:rPr sz="1300" b="1">
+                <a:solidFill>
+                  <a:srgbClr val="F2A104"/>
+                </a:solidFill>
+                <a:latin typeface="Calibri"/>
+              </a:rPr>
+              <a:t>Giảng viên hướng dẫn:  </a:t>
+            </a:r>
+            <a:r>
+              <a:rPr sz="1300" b="0">
                 <a:solidFill>
                   <a:srgbClr val="CFE0EC"/>
                 </a:solidFill>
-                <a:latin typeface="Calibri" panose="020F0502020204030204" pitchFamily="34" charset="0"/>
-                <a:ea typeface="Calibri" panose="020F0502020204030204" pitchFamily="34" charset="-122"/>
-                <a:cs typeface="Calibri" panose="020F0502020204030204" pitchFamily="34" charset="-120"/>
+                <a:latin typeface="Calibri"/>
               </a:rPr>
-              <a:t>Điểm F1 trên nhà máy B</a:t>
-            </a:r>
-            <a:endParaRPr lang="en-US" sz="1150" dirty="0"/>
-          </a:p>
-        </p:txBody>
-      </p:sp>
-      <p:sp>
-        <p:nvSpPr>
-          <p:cNvPr id="9" name="Shape 7"/>
-          <p:cNvSpPr/>
-          <p:nvPr/>
-        </p:nvSpPr>
-        <p:spPr>
-          <a:xfrm>
-            <a:off x="3474720" y="3977640"/>
-            <a:ext cx="2514600" cy="1371600"/>
-          </a:xfrm>
-          <a:prstGeom prst="roundRect">
-            <a:avLst>
-              <a:gd name="adj" fmla="val 6667"/>
-            </a:avLst>
-          </a:prstGeom>
-          <a:solidFill>
-            <a:srgbClr val="22384E"/>
-          </a:solidFill>
-          <a:ln w="12700">
-            <a:solidFill>
-              <a:srgbClr val="33506B"/>
-            </a:solidFill>
-            <a:prstDash val="solid"/>
-          </a:ln>
-        </p:spPr>
-      </p:sp>
-      <p:sp>
-        <p:nvSpPr>
-          <p:cNvPr id="10" name="Text 8"/>
-          <p:cNvSpPr/>
-          <p:nvPr/>
-        </p:nvSpPr>
-        <p:spPr>
-          <a:xfrm>
-            <a:off x="3474720" y="4087368"/>
-            <a:ext cx="2514600" cy="685800"/>
-          </a:xfrm>
-          <a:prstGeom prst="rect">
-            <a:avLst/>
-          </a:prstGeom>
-          <a:noFill/>
-        </p:spPr>
-        <p:txBody>
-          <a:bodyPr wrap="square" lIns="0" tIns="0" rIns="0" bIns="0" rtlCol="0" anchor="ctr"/>
-          <a:lstStyle/>
-          <a:p>
-            <a:pPr marL="0" indent="0" algn="ctr">
-              <a:buNone/>
-            </a:pPr>
-            <a:r>
-              <a:rPr lang="en-US" sz="3200" b="1" dirty="0">
-                <a:solidFill>
-                  <a:srgbClr val="1F8A8C"/>
-                </a:solidFill>
-                <a:latin typeface="Cambria" panose="02040503050406030204" pitchFamily="34" charset="0"/>
-                <a:ea typeface="Cambria" panose="02040503050406030204" pitchFamily="34" charset="-122"/>
-                <a:cs typeface="Cambria" panose="02040503050406030204" pitchFamily="34" charset="-120"/>
-              </a:rPr>
-              <a:t>3.4×</a:t>
-            </a:r>
-            <a:endParaRPr lang="en-US" sz="3200" dirty="0"/>
-          </a:p>
-        </p:txBody>
-      </p:sp>
-      <p:sp>
-        <p:nvSpPr>
-          <p:cNvPr id="11" name="Text 9"/>
-          <p:cNvSpPr/>
-          <p:nvPr/>
-        </p:nvSpPr>
-        <p:spPr>
-          <a:xfrm>
-            <a:off x="3566160" y="4800600"/>
-            <a:ext cx="2331720" cy="457200"/>
-          </a:xfrm>
-          <a:prstGeom prst="rect">
-            <a:avLst/>
-          </a:prstGeom>
-          <a:noFill/>
-        </p:spPr>
-        <p:txBody>
-          <a:bodyPr wrap="square" lIns="0" tIns="0" rIns="0" bIns="0" rtlCol="0" anchor="ctr"/>
-          <a:lstStyle/>
-          <a:p>
-            <a:pPr marL="0" indent="0" algn="ctr">
-              <a:buNone/>
-            </a:pPr>
-            <a:r>
-              <a:rPr lang="en-US" sz="1150" dirty="0">
-                <a:solidFill>
-                  <a:srgbClr val="CFE0EC"/>
-                </a:solidFill>
-                <a:latin typeface="Calibri" panose="020F0502020204030204" pitchFamily="34" charset="0"/>
-                <a:ea typeface="Calibri" panose="020F0502020204030204" pitchFamily="34" charset="-122"/>
-                <a:cs typeface="Calibri" panose="020F0502020204030204" pitchFamily="34" charset="-120"/>
-              </a:rPr>
-              <a:t>so với mô hình ban đầu</a:t>
-            </a:r>
-            <a:endParaRPr lang="en-US" sz="1150" dirty="0"/>
-          </a:p>
-        </p:txBody>
-      </p:sp>
-      <p:sp>
-        <p:nvSpPr>
-          <p:cNvPr id="12" name="Shape 10"/>
-          <p:cNvSpPr/>
-          <p:nvPr/>
-        </p:nvSpPr>
-        <p:spPr>
-          <a:xfrm>
-            <a:off x="6217920" y="3977640"/>
-            <a:ext cx="2514600" cy="1371600"/>
-          </a:xfrm>
-          <a:prstGeom prst="roundRect">
-            <a:avLst>
-              <a:gd name="adj" fmla="val 6667"/>
-            </a:avLst>
-          </a:prstGeom>
-          <a:solidFill>
-            <a:srgbClr val="22384E"/>
-          </a:solidFill>
-          <a:ln w="12700">
-            <a:solidFill>
-              <a:srgbClr val="33506B"/>
-            </a:solidFill>
-            <a:prstDash val="solid"/>
-          </a:ln>
-        </p:spPr>
-      </p:sp>
-      <p:sp>
-        <p:nvSpPr>
-          <p:cNvPr id="13" name="Text 11"/>
-          <p:cNvSpPr/>
-          <p:nvPr/>
-        </p:nvSpPr>
-        <p:spPr>
-          <a:xfrm>
-            <a:off x="6217920" y="4087368"/>
-            <a:ext cx="2514600" cy="685800"/>
-          </a:xfrm>
-          <a:prstGeom prst="rect">
-            <a:avLst/>
-          </a:prstGeom>
-          <a:noFill/>
-        </p:spPr>
-        <p:txBody>
-          <a:bodyPr wrap="square" lIns="0" tIns="0" rIns="0" bIns="0" rtlCol="0" anchor="ctr"/>
-          <a:lstStyle/>
-          <a:p>
-            <a:pPr marL="0" indent="0" algn="ctr">
-              <a:buNone/>
-            </a:pPr>
-            <a:r>
-              <a:rPr lang="en-US" sz="3200" b="1" dirty="0">
-                <a:solidFill>
-                  <a:srgbClr val="FFFFFF"/>
-                </a:solidFill>
-                <a:latin typeface="Cambria" panose="02040503050406030204" pitchFamily="34" charset="0"/>
-                <a:ea typeface="Cambria" panose="02040503050406030204" pitchFamily="34" charset="-122"/>
-                <a:cs typeface="Cambria" panose="02040503050406030204" pitchFamily="34" charset="-120"/>
-              </a:rPr>
-              <a:t>~8%</a:t>
-            </a:r>
-            <a:endParaRPr lang="en-US" sz="3200" dirty="0"/>
-          </a:p>
-        </p:txBody>
-      </p:sp>
-      <p:sp>
-        <p:nvSpPr>
-          <p:cNvPr id="14" name="Text 12"/>
-          <p:cNvSpPr/>
-          <p:nvPr/>
-        </p:nvSpPr>
-        <p:spPr>
-          <a:xfrm>
-            <a:off x="6309360" y="4800600"/>
-            <a:ext cx="2331720" cy="457200"/>
-          </a:xfrm>
-          <a:prstGeom prst="rect">
-            <a:avLst/>
-          </a:prstGeom>
-          <a:noFill/>
-        </p:spPr>
-        <p:txBody>
-          <a:bodyPr wrap="square" lIns="0" tIns="0" rIns="0" bIns="0" rtlCol="0" anchor="ctr"/>
-          <a:lstStyle/>
-          <a:p>
-            <a:pPr marL="0" indent="0" algn="ctr">
-              <a:buNone/>
-            </a:pPr>
-            <a:r>
-              <a:rPr lang="en-US" sz="1150" dirty="0">
-                <a:solidFill>
-                  <a:srgbClr val="CFE0EC"/>
-                </a:solidFill>
-                <a:latin typeface="Calibri" panose="020F0502020204030204" pitchFamily="34" charset="0"/>
-                <a:ea typeface="Calibri" panose="020F0502020204030204" pitchFamily="34" charset="-122"/>
-                <a:cs typeface="Calibri" panose="020F0502020204030204" pitchFamily="34" charset="-120"/>
-              </a:rPr>
-              <a:t>tỉ lệ máy hỏng (rất hiếm)</a:t>
-            </a:r>
-            <a:endParaRPr lang="en-US" sz="1150" dirty="0"/>
-          </a:p>
-        </p:txBody>
-      </p:sp>
-      <p:sp>
-        <p:nvSpPr>
-          <p:cNvPr id="15" name="Shape 13"/>
-          <p:cNvSpPr/>
-          <p:nvPr/>
-        </p:nvSpPr>
-        <p:spPr>
-          <a:xfrm>
-            <a:off x="8961120" y="3977640"/>
-            <a:ext cx="2514600" cy="1371600"/>
-          </a:xfrm>
-          <a:prstGeom prst="roundRect">
-            <a:avLst>
-              <a:gd name="adj" fmla="val 6667"/>
-            </a:avLst>
-          </a:prstGeom>
-          <a:solidFill>
-            <a:srgbClr val="22384E"/>
-          </a:solidFill>
-          <a:ln w="12700">
-            <a:solidFill>
-              <a:srgbClr val="33506B"/>
-            </a:solidFill>
-            <a:prstDash val="solid"/>
-          </a:ln>
-        </p:spPr>
-      </p:sp>
-      <p:sp>
-        <p:nvSpPr>
-          <p:cNvPr id="16" name="Text 14"/>
-          <p:cNvSpPr/>
-          <p:nvPr/>
-        </p:nvSpPr>
-        <p:spPr>
-          <a:xfrm>
-            <a:off x="8961120" y="4087368"/>
-            <a:ext cx="2514600" cy="685800"/>
-          </a:xfrm>
-          <a:prstGeom prst="rect">
-            <a:avLst/>
-          </a:prstGeom>
-          <a:noFill/>
-        </p:spPr>
-        <p:txBody>
-          <a:bodyPr wrap="square" lIns="0" tIns="0" rIns="0" bIns="0" rtlCol="0" anchor="ctr"/>
-          <a:lstStyle/>
-          <a:p>
-            <a:pPr marL="0" indent="0" algn="ctr">
-              <a:buNone/>
-            </a:pPr>
-            <a:r>
-              <a:rPr lang="en-US" sz="3200" b="1" dirty="0">
-                <a:solidFill>
-                  <a:srgbClr val="FFFFFF"/>
-                </a:solidFill>
-                <a:latin typeface="Cambria" panose="02040503050406030204" pitchFamily="34" charset="0"/>
-                <a:ea typeface="Cambria" panose="02040503050406030204" pitchFamily="34" charset="-122"/>
-                <a:cs typeface="Cambria" panose="02040503050406030204" pitchFamily="34" charset="-120"/>
-              </a:rPr>
-              <a:t>0</a:t>
-            </a:r>
-            <a:endParaRPr lang="en-US" sz="3200" dirty="0"/>
-          </a:p>
-        </p:txBody>
-      </p:sp>
-      <p:sp>
-        <p:nvSpPr>
-          <p:cNvPr id="17" name="Text 15"/>
-          <p:cNvSpPr/>
-          <p:nvPr/>
-        </p:nvSpPr>
-        <p:spPr>
-          <a:xfrm>
-            <a:off x="9052560" y="4800600"/>
-            <a:ext cx="2331720" cy="457200"/>
-          </a:xfrm>
-          <a:prstGeom prst="rect">
-            <a:avLst/>
-          </a:prstGeom>
-          <a:noFill/>
-        </p:spPr>
-        <p:txBody>
-          <a:bodyPr wrap="square" lIns="0" tIns="0" rIns="0" bIns="0" rtlCol="0" anchor="ctr"/>
-          <a:lstStyle/>
-          <a:p>
-            <a:pPr marL="0" indent="0" algn="ctr">
-              <a:buNone/>
-            </a:pPr>
-            <a:r>
-              <a:rPr lang="en-US" sz="1150" dirty="0">
-                <a:solidFill>
-                  <a:srgbClr val="CFE0EC"/>
-                </a:solidFill>
-                <a:latin typeface="Calibri" panose="020F0502020204030204" pitchFamily="34" charset="0"/>
-                <a:ea typeface="Calibri" panose="020F0502020204030204" pitchFamily="34" charset="-122"/>
-                <a:cs typeface="Calibri" panose="020F0502020204030204" pitchFamily="34" charset="-120"/>
-              </a:rPr>
-              <a:t>lỗi khi chạy full notebook</a:t>
-            </a:r>
-            <a:endParaRPr lang="en-US" sz="1150" dirty="0"/>
-          </a:p>
-        </p:txBody>
-      </p:sp>
-      <p:sp>
-        <p:nvSpPr>
-          <p:cNvPr id="18" name="Text 16"/>
-          <p:cNvSpPr/>
-          <p:nvPr/>
-        </p:nvSpPr>
-        <p:spPr>
-          <a:xfrm>
-            <a:off x="731520" y="5943600"/>
-            <a:ext cx="10515600" cy="365760"/>
-          </a:xfrm>
-          <a:prstGeom prst="rect">
-            <a:avLst/>
-          </a:prstGeom>
-          <a:noFill/>
-        </p:spPr>
-        <p:txBody>
-          <a:bodyPr wrap="square" lIns="0" tIns="0" rIns="0" bIns="0" rtlCol="0" anchor="ctr"/>
-          <a:lstStyle/>
-          <a:p>
-            <a:pPr marL="0" indent="0">
-              <a:buNone/>
-            </a:pPr>
-            <a:endParaRPr lang="en-US" sz="1300" dirty="0"/>
+              <a:t>TS. Cao Tiến Dũng</a:t>
+            </a:r>
           </a:p>
         </p:txBody>
       </p:sp>
@@ -4293,6 +4022,10 @@
             <a:prstDash val="solid"/>
           </a:ln>
         </p:spPr>
+        <p:txBody>
+          <a:bodyPr/>
+          <a:p/>
+        </p:txBody>
       </p:sp>
       <p:sp>
         <p:nvSpPr>
@@ -4477,7 +4210,7 @@
                 <a:ea typeface="Cambria" panose="02040503050406030204" pitchFamily="34" charset="-122"/>
                 <a:cs typeface="Cambria" panose="02040503050406030204" pitchFamily="34" charset="-120"/>
               </a:rPr>
-              <a:t>Phần 2.2 — Tạo 3 đặc trưng "còn cách ngưỡng hỏng bao xa"</a:t>
+              <a:t>Phần 2.2 — Tạo 4 đặc trưng "còn cách ngưỡng hỏng bao xa"</a:t>
             </a:r>
             <a:endParaRPr lang="en-US" sz="2700" dirty="0"/>
           </a:p>
@@ -5177,7 +4910,7 @@
                           <a:ea typeface="Calibri" panose="020F0502020204030204" pitchFamily="34" charset="-122"/>
                           <a:cs typeface="Calibri" panose="020F0502020204030204" pitchFamily="34" charset="-120"/>
                         </a:rPr>
-                        <a:t>max(3500 − P, 0) + max(P − 9000, 0)</a:t>
+                        <a:t>max(2600 − P, 0) + max(P − 11500, 0)</a:t>
                       </a:r>
                       <a:endParaRPr lang="en-US" sz="1300" dirty="0">
                         <a:latin typeface="Calibri" panose="020F0502020204030204" pitchFamily="34" charset="0"/>
@@ -5639,6 +5372,280 @@
                   </a:tcPr>
                 </a:tc>
               </a:tr>
+              <a:tr h="457200">
+                <a:tc>
+                  <a:txBody>
+                    <a:bodyPr/>
+                    <a:lstStyle/>
+                    <a:p>
+                      <a:pPr marL="0" indent="0" algn="l">
+                        <a:buNone/>
+                      </a:pPr>
+                      <a:r>
+                        <a:rPr lang="en-US" sz="1300" dirty="0">
+                          <a:solidFill>
+                            <a:srgbClr val="1B2733"/>
+                          </a:solidFill>
+                          <a:latin typeface="Calibri" panose="020F0502020204030204" pitchFamily="34" charset="0"/>
+                          <a:ea typeface="Calibri" panose="020F0502020204030204" pitchFamily="34" charset="-122"/>
+                          <a:cs typeface="Calibri" panose="020F0502020204030204" pitchFamily="34" charset="-120"/>
+                        </a:rPr>
+                        <a:t>mon_twf</a:t>
+                      </a:r>
+                      <a:endParaRPr lang="en-US" sz="1300" dirty="0">
+                        <a:latin typeface="Calibri" panose="020F0502020204030204" pitchFamily="34" charset="0"/>
+                        <a:ea typeface="Calibri" panose="020F0502020204030204" pitchFamily="34" charset="0"/>
+                        <a:cs typeface="Calibri" panose="020F0502020204030204" pitchFamily="34" charset="0"/>
+                      </a:endParaRPr>
+                    </a:p>
+                  </a:txBody>
+                  <a:tcPr marL="50800" marR="50800" marT="25400" marB="25400" anchor="ctr">
+                    <a:lnL w="12700" cap="flat" cmpd="sng" algn="ctr">
+                      <a:solidFill>
+                        <a:srgbClr val="D6DFE7"/>
+                      </a:solidFill>
+                      <a:prstDash val="solid"/>
+                      <a:round/>
+                      <a:headEnd type="none" w="med" len="med"/>
+                      <a:tailEnd type="none" w="med" len="med"/>
+                    </a:lnL>
+                    <a:lnR w="12700" cap="flat" cmpd="sng" algn="ctr">
+                      <a:solidFill>
+                        <a:srgbClr val="D6DFE7"/>
+                      </a:solidFill>
+                      <a:prstDash val="solid"/>
+                      <a:round/>
+                      <a:headEnd type="none" w="med" len="med"/>
+                      <a:tailEnd type="none" w="med" len="med"/>
+                    </a:lnR>
+                    <a:lnT w="12700" cap="flat" cmpd="sng" algn="ctr">
+                      <a:solidFill>
+                        <a:srgbClr val="D6DFE7"/>
+                      </a:solidFill>
+                      <a:prstDash val="solid"/>
+                      <a:round/>
+                      <a:headEnd type="none" w="med" len="med"/>
+                      <a:tailEnd type="none" w="med" len="med"/>
+                    </a:lnT>
+                    <a:lnB w="12700" cap="flat" cmpd="sng" algn="ctr">
+                      <a:solidFill>
+                        <a:srgbClr val="D6DFE7"/>
+                      </a:solidFill>
+                      <a:prstDash val="solid"/>
+                      <a:round/>
+                      <a:headEnd type="none" w="med" len="med"/>
+                      <a:tailEnd type="none" w="med" len="med"/>
+                    </a:lnB>
+                    <a:solidFill>
+                      <a:srgbClr val="FFFFFF"/>
+                    </a:solidFill>
+                  </a:tcPr>
+                </a:tc>
+                <a:tc>
+                  <a:txBody>
+                    <a:bodyPr/>
+                    <a:lstStyle/>
+                    <a:p>
+                      <a:pPr marL="0" indent="0" algn="ctr">
+                        <a:buNone/>
+                      </a:pPr>
+                      <a:r>
+                        <a:rPr lang="en-US" sz="1100" dirty="0">
+                          <a:solidFill>
+                            <a:srgbClr val="1B2733"/>
+                          </a:solidFill>
+                          <a:latin typeface="Calibri" panose="020F0502020204030204" pitchFamily="34" charset="0"/>
+                          <a:ea typeface="Calibri" panose="020F0502020204030204" pitchFamily="34" charset="-122"/>
+                          <a:cs typeface="Calibri" panose="020F0502020204030204" pitchFamily="34" charset="-120"/>
+                        </a:rPr>
+                        <a:t>max(mòn − 244, 0)</a:t>
+                      </a:r>
+                      <a:endParaRPr lang="en-US" sz="1300" dirty="0">
+                        <a:latin typeface="Calibri" panose="020F0502020204030204" pitchFamily="34" charset="0"/>
+                        <a:ea typeface="Calibri" panose="020F0502020204030204" pitchFamily="34" charset="0"/>
+                        <a:cs typeface="Calibri" panose="020F0502020204030204" pitchFamily="34" charset="0"/>
+                      </a:endParaRPr>
+                    </a:p>
+                  </a:txBody>
+                  <a:tcPr marL="50800" marR="50800" marT="25400" marB="25400" anchor="ctr">
+                    <a:lnL w="12700" cap="flat" cmpd="sng" algn="ctr">
+                      <a:solidFill>
+                        <a:srgbClr val="D6DFE7"/>
+                      </a:solidFill>
+                      <a:prstDash val="solid"/>
+                      <a:round/>
+                      <a:headEnd type="none" w="med" len="med"/>
+                      <a:tailEnd type="none" w="med" len="med"/>
+                    </a:lnL>
+                    <a:lnR w="12700" cap="flat" cmpd="sng" algn="ctr">
+                      <a:solidFill>
+                        <a:srgbClr val="D6DFE7"/>
+                      </a:solidFill>
+                      <a:prstDash val="solid"/>
+                      <a:round/>
+                      <a:headEnd type="none" w="med" len="med"/>
+                      <a:tailEnd type="none" w="med" len="med"/>
+                    </a:lnR>
+                    <a:lnT w="12700" cap="flat" cmpd="sng" algn="ctr">
+                      <a:solidFill>
+                        <a:srgbClr val="D6DFE7"/>
+                      </a:solidFill>
+                      <a:prstDash val="solid"/>
+                      <a:round/>
+                      <a:headEnd type="none" w="med" len="med"/>
+                      <a:tailEnd type="none" w="med" len="med"/>
+                    </a:lnT>
+                    <a:lnB w="12700" cap="flat" cmpd="sng" algn="ctr">
+                      <a:solidFill>
+                        <a:srgbClr val="D6DFE7"/>
+                      </a:solidFill>
+                      <a:prstDash val="solid"/>
+                      <a:round/>
+                      <a:headEnd type="none" w="med" len="med"/>
+                      <a:tailEnd type="none" w="med" len="med"/>
+                    </a:lnB>
+                    <a:solidFill>
+                      <a:srgbClr val="FFFFFF"/>
+                    </a:solidFill>
+                  </a:tcPr>
+                </a:tc>
+                <a:tc>
+                  <a:txBody>
+                    <a:bodyPr/>
+                    <a:lstStyle/>
+                    <a:p>
+                      <a:pPr marL="0" indent="0" algn="ctr">
+                        <a:buNone/>
+                      </a:pPr>
+                      <a:r>
+                        <a:rPr lang="en-US" sz="1100" dirty="0">
+                          <a:solidFill>
+                            <a:srgbClr val="1B2733"/>
+                          </a:solidFill>
+                          <a:latin typeface="Calibri" panose="020F0502020204030204" pitchFamily="34" charset="0"/>
+                          <a:ea typeface="Calibri" panose="020F0502020204030204" pitchFamily="34" charset="-122"/>
+                          <a:cs typeface="Calibri" panose="020F0502020204030204" pitchFamily="34" charset="-120"/>
+                        </a:rPr>
+                        <a:t>độ mòn dao vượt ngưỡng thay dao</a:t>
+                      </a:r>
+                      <a:endParaRPr lang="en-US" sz="1300" dirty="0">
+                        <a:latin typeface="Calibri" panose="020F0502020204030204" pitchFamily="34" charset="0"/>
+                        <a:ea typeface="Calibri" panose="020F0502020204030204" pitchFamily="34" charset="0"/>
+                        <a:cs typeface="Calibri" panose="020F0502020204030204" pitchFamily="34" charset="0"/>
+                      </a:endParaRPr>
+                    </a:p>
+                  </a:txBody>
+                  <a:tcPr marL="50800" marR="50800" marT="25400" marB="25400" anchor="ctr">
+                    <a:lnL w="12700" cap="flat" cmpd="sng" algn="ctr">
+                      <a:solidFill>
+                        <a:srgbClr val="D6DFE7"/>
+                      </a:solidFill>
+                      <a:prstDash val="solid"/>
+                      <a:round/>
+                      <a:headEnd type="none" w="med" len="med"/>
+                      <a:tailEnd type="none" w="med" len="med"/>
+                    </a:lnL>
+                    <a:lnR w="12700" cap="flat" cmpd="sng" algn="ctr">
+                      <a:solidFill>
+                        <a:srgbClr val="D6DFE7"/>
+                      </a:solidFill>
+                      <a:prstDash val="solid"/>
+                      <a:round/>
+                      <a:headEnd type="none" w="med" len="med"/>
+                      <a:tailEnd type="none" w="med" len="med"/>
+                    </a:lnR>
+                    <a:lnT w="12700" cap="flat" cmpd="sng" algn="ctr">
+                      <a:solidFill>
+                        <a:srgbClr val="D6DFE7"/>
+                      </a:solidFill>
+                      <a:prstDash val="solid"/>
+                      <a:round/>
+                      <a:headEnd type="none" w="med" len="med"/>
+                      <a:tailEnd type="none" w="med" len="med"/>
+                    </a:lnT>
+                    <a:lnB w="12700" cap="flat" cmpd="sng" algn="ctr">
+                      <a:solidFill>
+                        <a:srgbClr val="D6DFE7"/>
+                      </a:solidFill>
+                      <a:prstDash val="solid"/>
+                      <a:round/>
+                      <a:headEnd type="none" w="med" len="med"/>
+                      <a:tailEnd type="none" w="med" len="med"/>
+                    </a:lnB>
+                    <a:solidFill>
+                      <a:srgbClr val="FFFFFF"/>
+                    </a:solidFill>
+                  </a:tcPr>
+                </a:tc>
+                <a:tc>
+                  <a:txBody>
+                    <a:bodyPr/>
+                    <a:lstStyle/>
+                    <a:p>
+                      <a:pPr marL="0" indent="0" algn="ctr">
+                        <a:buNone/>
+                      </a:pPr>
+                      <a:r>
+                        <a:rPr lang="en-US" sz="1300" dirty="0">
+                          <a:solidFill>
+                            <a:srgbClr val="1B2733"/>
+                          </a:solidFill>
+                          <a:latin typeface="Calibri" panose="020F0502020204030204" pitchFamily="34" charset="0"/>
+                          <a:ea typeface="Calibri" panose="020F0502020204030204" pitchFamily="34" charset="-122"/>
+                          <a:cs typeface="Calibri" panose="020F0502020204030204" pitchFamily="34" charset="-120"/>
+                        </a:rPr>
+                        <a:t>mòn dao (TWF)</a:t>
+                      </a:r>
+                      <a:endParaRPr lang="en-US" sz="1300" dirty="0">
+                        <a:latin typeface="Calibri" panose="020F0502020204030204" pitchFamily="34" charset="0"/>
+                        <a:ea typeface="Calibri" panose="020F0502020204030204" pitchFamily="34" charset="0"/>
+                        <a:cs typeface="Calibri" panose="020F0502020204030204" pitchFamily="34" charset="0"/>
+                      </a:endParaRPr>
+                    </a:p>
+                  </a:txBody>
+                  <a:tcPr marL="50800" marR="50800" marT="25400" marB="25400" anchor="ctr">
+                    <a:lnL w="12700" cap="flat" cmpd="sng" algn="ctr">
+                      <a:solidFill>
+                        <a:srgbClr val="D6DFE7"/>
+                      </a:solidFill>
+                      <a:prstDash val="solid"/>
+                      <a:round/>
+                      <a:headEnd type="none" w="med" len="med"/>
+                      <a:tailEnd type="none" w="med" len="med"/>
+                    </a:lnL>
+                    <a:lnR w="12700" cap="flat" cmpd="sng" algn="ctr">
+                      <a:solidFill>
+                        <a:srgbClr val="D6DFE7"/>
+                      </a:solidFill>
+                      <a:prstDash val="solid"/>
+                      <a:round/>
+                      <a:headEnd type="none" w="med" len="med"/>
+                      <a:tailEnd type="none" w="med" len="med"/>
+                    </a:lnR>
+                    <a:lnT w="12700" cap="flat" cmpd="sng" algn="ctr">
+                      <a:solidFill>
+                        <a:srgbClr val="D6DFE7"/>
+                      </a:solidFill>
+                      <a:prstDash val="solid"/>
+                      <a:round/>
+                      <a:headEnd type="none" w="med" len="med"/>
+                      <a:tailEnd type="none" w="med" len="med"/>
+                    </a:lnT>
+                    <a:lnB w="12700" cap="flat" cmpd="sng" algn="ctr">
+                      <a:solidFill>
+                        <a:srgbClr val="D6DFE7"/>
+                      </a:solidFill>
+                      <a:prstDash val="solid"/>
+                      <a:round/>
+                      <a:headEnd type="none" w="med" len="med"/>
+                      <a:tailEnd type="none" w="med" len="med"/>
+                    </a:lnB>
+                    <a:solidFill>
+                      <a:srgbClr val="FFFFFF"/>
+                    </a:solidFill>
+                  </a:tcPr>
+                </a:tc>
+              </a:tr>
             </a:tbl>
           </a:graphicData>
         </a:graphic>
@@ -5651,7 +5658,7 @@
         </p:nvSpPr>
         <p:spPr>
           <a:xfrm>
-            <a:off x="575945" y="4069080"/>
+            <a:off x="575945" y="4526280"/>
             <a:ext cx="11064240" cy="1010920"/>
           </a:xfrm>
           <a:prstGeom prst="rect">
@@ -5679,7 +5686,7 @@
                 <a:ea typeface="Calibri" panose="020F0502020204030204" pitchFamily="34" charset="-122"/>
                 <a:cs typeface="Calibri" panose="020F0502020204030204" pitchFamily="34" charset="-120"/>
               </a:rPr>
-              <a:t>Vì sao hay: các ngưỡng (8,6° / 1380 v/ph / 3500–9000W) là HẰNG SỐ VẬT LÝ → không đổi giữa A và B → 3 đặc trưng 'miễn nhiễm' với shift.</a:t>
+              <a:t>Vì sao hay: các ngưỡng (8,6°/1380 v/ph/2600–11500W/mòn 244) là HẰNG SỐ CƠ CHẾ — khôi phục từ A, kiểm chứng bất biến trên B → 4 đặc trưng 'miễn nhiễm' với shift.</a:t>
             </a:r>
             <a:endParaRPr lang="en-US" sz="1450" dirty="0"/>
           </a:p>
@@ -5700,7 +5707,7 @@
                 <a:ea typeface="Calibri" panose="020F0502020204030204" pitchFamily="34" charset="-122"/>
                 <a:cs typeface="Calibri" panose="020F0502020204030204" pitchFamily="34" charset="-120"/>
               </a:rPr>
-              <a:t>Kiểm chứng bằng số (đề yêu cầu): chỉ thêm 3 đặc trưng, mô hình đơn giản mạnh gần GẤP ĐÔI — AUC-PR 0,22 → 0,50.</a:t>
+              <a:t>Kiểm chứng bằng số (đề yêu cầu): chỉ thêm 4 đặc trưng, mô hình đơn giản mạnh gần GẤP BA — AUC-PR 0,22 → 0,65.</a:t>
             </a:r>
             <a:endParaRPr lang="en-US" sz="1450" dirty="0"/>
           </a:p>
@@ -5721,7 +5728,7 @@
                 <a:ea typeface="Calibri" panose="020F0502020204030204" pitchFamily="34" charset="-122"/>
                 <a:cs typeface="Calibri" panose="020F0502020204030204" pitchFamily="34" charset="-120"/>
               </a:rPr>
-              <a:t>Cả 3 tương quan với hỏng mạnh ngang/hơn độ mòn dao → không phải thêm cho có.</a:t>
+              <a:t>Cả 4 tương quan với hỏng mạnh; nhất là mon_twf (0,43) — hơn cả độ mòn thô (0,20) → không phải thêm cho có.</a:t>
             </a:r>
             <a:endParaRPr lang="en-US" sz="1450" dirty="0"/>
           </a:p>
@@ -5735,7 +5742,7 @@
         </p:nvSpPr>
         <p:spPr>
           <a:xfrm>
-            <a:off x="576072" y="5212080"/>
+            <a:off x="576072" y="5669280"/>
             <a:ext cx="11064240" cy="502920"/>
           </a:xfrm>
           <a:prstGeom prst="rect">
@@ -7005,7 +7012,7 @@
                           <a:ea typeface="Calibri" panose="020F0502020204030204" pitchFamily="34" charset="-122"/>
                           <a:cs typeface="Calibri" panose="020F0502020204030204" pitchFamily="34" charset="-120"/>
                         </a:rPr>
-                        <a:t>3 đặc trưng vật lý</a:t>
+                        <a:t>4 đặc trưng vật lý</a:t>
                       </a:r>
                       <a:endParaRPr lang="en-US" sz="1250" dirty="0">
                         <a:latin typeface="Calibri" panose="020F0502020204030204" pitchFamily="34" charset="0"/>
@@ -7141,7 +7148,7 @@
                           <a:ea typeface="Calibri" panose="020F0502020204030204" pitchFamily="34" charset="-122"/>
                           <a:cs typeface="Calibri" panose="020F0502020204030204" pitchFamily="34" charset="-120"/>
                         </a:rPr>
-                        <a:t>≈ 0,01</a:t>
+                        <a:t>≤ 0,06</a:t>
                       </a:r>
                       <a:endParaRPr lang="en-US" sz="1250" dirty="0">
                         <a:latin typeface="Calibri" panose="020F0502020204030204" pitchFamily="34" charset="0"/>
@@ -7565,6 +7572,10 @@
             <a:prstDash val="solid"/>
           </a:ln>
         </p:spPr>
+        <p:txBody>
+          <a:bodyPr/>
+          <a:p/>
+        </p:txBody>
       </p:sp>
       <p:pic>
         <p:nvPicPr>
@@ -7654,6 +7665,10 @@
             <a:prstDash val="solid"/>
           </a:ln>
         </p:spPr>
+        <p:txBody>
+          <a:bodyPr/>
+          <a:p/>
+        </p:txBody>
       </p:sp>
       <p:sp>
         <p:nvSpPr>
@@ -7698,7 +7713,7 @@
                 <a:ea typeface="Calibri" panose="020F0502020204030204" pitchFamily="34" charset="-122"/>
                 <a:cs typeface="Calibri" panose="020F0502020204030204" pitchFamily="34" charset="-120"/>
               </a:rPr>
-              <a:t>2 đặc trưng hinge phần lớn = 0 nên PSI bị 'bão hoà' về 0. Bằng chứng bất biến CHÍNH là drift-AUC 0,51 và bảng P(hỏng|cờ), không chỉ dựa PSI.</a:t>
+              <a:t>3 đặc trưng hinge phần lớn = 0 nên PSI bị 'bão hoà' về 0. Bằng chứng bất biến CHÍNH là drift-AUC 0,53 và bảng P(hỏng|cờ), không chỉ dựa PSI.</a:t>
             </a:r>
             <a:endParaRPr lang="en-US" sz="1250" dirty="0"/>
           </a:p>
@@ -7891,7 +7906,7 @@
                 <a:ea typeface="Calibri" panose="020F0502020204030204" pitchFamily="34" charset="-122"/>
                 <a:cs typeface="Calibri" panose="020F0502020204030204" pitchFamily="34" charset="-120"/>
               </a:rPr>
-              <a:t>Chỉ 3 đặc trưng vật lý → AUC 0,51 ≈ tung đồng xu → gần như KHÔNG phân biệt được A/B.</a:t>
+              <a:t>Chỉ 4 đặc trưng vật lý → AUC 0,53 ≈ tung đồng xu → gần như KHÔNG phân biệt được A/B.</a:t>
             </a:r>
             <a:endParaRPr lang="en-US" sz="1550" dirty="0"/>
           </a:p>
@@ -7912,7 +7927,7 @@
                 <a:ea typeface="Calibri" panose="020F0502020204030204" pitchFamily="34" charset="-122"/>
                 <a:cs typeface="Calibri" panose="020F0502020204030204" pitchFamily="34" charset="-120"/>
               </a:rPr>
-              <a:t>Thêm bằng chứng: 'khi máy vượt ngưỡng nguy hiểm thì tỉ lệ hỏng' GIỐNG nhau A↔B (0,84 vs 0,83).</a:t>
+              <a:t>Thêm bằng chứng: 'khi máy vượt ngưỡng nguy hiểm thì tỉ lệ hỏng' GIỐNG nhau A↔B (0,84 vs 0,82).</a:t>
             </a:r>
             <a:endParaRPr lang="en-US" sz="1550" dirty="0"/>
           </a:p>
@@ -8067,7 +8082,7 @@
                 <a:ea typeface="Cambria" panose="02040503050406030204" pitchFamily="34" charset="-122"/>
                 <a:cs typeface="Cambria" panose="02040503050406030204" pitchFamily="34" charset="-120"/>
               </a:rPr>
-              <a:t>0,51
+              <a:t>0,53
 </a:t>
             </a:r>
             <a:r>
@@ -8079,7 +8094,7 @@
                 <a:ea typeface="Calibri" panose="020F0502020204030204" pitchFamily="34" charset="-122"/>
                 <a:cs typeface="Calibri" panose="020F0502020204030204" pitchFamily="34" charset="-120"/>
               </a:rPr>
-              <a:t>AUC khi chỉ dùng 3 đặc trưng</a:t>
+              <a:t>AUC khi chỉ dùng 4 đặc trưng</a:t>
             </a:r>
             <a:endParaRPr lang="en-US" sz="3400" dirty="0"/>
           </a:p>
@@ -8177,6 +8192,10 @@
             <a:srgbClr val="16283A"/>
           </a:solidFill>
         </p:spPr>
+        <p:txBody>
+          <a:bodyPr/>
+          <a:p/>
+        </p:txBody>
       </p:sp>
       <p:sp>
         <p:nvSpPr>
@@ -8198,6 +8217,10 @@
             <a:srgbClr val="C4444E"/>
           </a:solidFill>
         </p:spPr>
+        <p:txBody>
+          <a:bodyPr/>
+          <a:p/>
+        </p:txBody>
       </p:sp>
       <p:sp>
         <p:nvSpPr>
@@ -8378,7 +8401,7 @@
                 <a:ea typeface="Cambria" panose="02040503050406030204" pitchFamily="34" charset="-122"/>
                 <a:cs typeface="Cambria" panose="02040503050406030204" pitchFamily="34" charset="-120"/>
               </a:rPr>
-              <a:t>Phần 3.3 — Xử lý lệch #1: chú ý các máy "giống B"</a:t>
+              <a:t>Phần 3.3 — Xử lý lệch bằng TRỌNG SỐ (Reweighting)</a:t>
             </a:r>
             <a:endParaRPr lang="en-US" sz="2700" dirty="0"/>
           </a:p>
@@ -8521,7 +8544,7 @@
                 <a:ea typeface="Calibri" panose="020F0502020204030204" pitchFamily="34" charset="-122"/>
                 <a:cs typeface="Calibri" panose="020F0502020204030204" pitchFamily="34" charset="-120"/>
               </a:rPr>
-              <a:t>Kết quả trước → sau: AUC-PR chỉ nhích nhẹ 0,669 → 0,672.</a:t>
+              <a:t>Kết quả trước → sau: gần như đứng yên (F1 giữ 0,783; AUC-PR 0,675 → 0,671).</a:t>
             </a:r>
             <a:endParaRPr lang="en-US" sz="1550" dirty="0"/>
           </a:p>
@@ -8542,7 +8565,7 @@
                 <a:ea typeface="Calibri" panose="020F0502020204030204" pitchFamily="34" charset="-122"/>
                 <a:cs typeface="Calibri" panose="020F0502020204030204" pitchFamily="34" charset="-120"/>
               </a:rPr>
-              <a:t>Nhích nhẹ là TIN TỐT: 3 đặc trưng vật lý đã lo gần hết việc chống lệch; kỹ thuật này chỉ vá phần nhỏ.</a:t>
+              <a:t>Đứng yên là TIN TỐT: 4 đặc trưng vật lý đã lo gần hết việc chống lệch; kỹ thuật này chỉ vá phần nhỏ.</a:t>
             </a:r>
             <a:endParaRPr lang="en-US" sz="1550" dirty="0"/>
           </a:p>
@@ -8564,8 +8587,8 @@
         </p:blipFill>
         <p:spPr>
           <a:xfrm>
-            <a:off x="5374005" y="1107440"/>
-            <a:ext cx="6238875" cy="3409315"/>
+            <a:off x="5374005" y="1822368"/>
+            <a:ext cx="6238875" cy="1979459"/>
           </a:xfrm>
           <a:prstGeom prst="rect">
             <a:avLst/>
@@ -8604,7 +8627,7 @@
                 <a:ea typeface="Calibri" panose="020F0502020204030204" pitchFamily="34" charset="-122"/>
                 <a:cs typeface="Calibri" panose="020F0502020204030204" pitchFamily="34" charset="-120"/>
               </a:rPr>
-              <a:t>Trọng số density-ratio: trước (nổ tới ~57) → sau clip[0,2;10]</a:t>
+              <a:t>Trọng số density-ratio: trước (nổ tới ~77) → sau clip[0,2;10]</a:t>
             </a:r>
             <a:endParaRPr lang="en-US" sz="1000" dirty="0"/>
           </a:p>
@@ -8636,6 +8659,10 @@
             <a:prstDash val="solid"/>
           </a:ln>
         </p:spPr>
+        <p:txBody>
+          <a:bodyPr/>
+          <a:p/>
+        </p:txBody>
       </p:sp>
       <p:sp>
         <p:nvSpPr>
@@ -8692,7 +8719,7 @@
                 <a:ea typeface="Calibri" panose="020F0502020204030204" pitchFamily="34" charset="-122"/>
                 <a:cs typeface="Calibri" panose="020F0502020204030204" pitchFamily="34" charset="-120"/>
               </a:rPr>
-              <a:t>AUC-PR:  0,669  →  0,672</a:t>
+              <a:t>AUC-PR:  0,675  →  0,671</a:t>
             </a:r>
             <a:endParaRPr lang="en-US" sz="1400" dirty="0"/>
           </a:p>
@@ -8712,7 +8739,7 @@
                 <a:ea typeface="Calibri" panose="020F0502020204030204" pitchFamily="34" charset="-122"/>
                 <a:cs typeface="Calibri" panose="020F0502020204030204" pitchFamily="34" charset="-120"/>
               </a:rPr>
-              <a:t>F1:          0,770  →  0,764</a:t>
+              <a:t>F1:          0,783  →  0,783</a:t>
             </a:r>
             <a:endParaRPr lang="en-US" sz="1400" dirty="0"/>
           </a:p>
@@ -8800,7 +8827,7 @@
                 <a:ea typeface="Cambria" panose="02040503050406030204" pitchFamily="34" charset="-122"/>
                 <a:cs typeface="Cambria" panose="02040503050406030204" pitchFamily="34" charset="-120"/>
               </a:rPr>
-              <a:t>Phần 3.4 — Xử lý lệch #2: chọn ngưỡng &amp; chấm thử trung thực</a:t>
+              <a:t>Phần 3.4 — Chọn NGƯỠNG trung thực (IWV)</a:t>
             </a:r>
             <a:endParaRPr lang="en-US" sz="2700" dirty="0"/>
           </a:p>
@@ -8996,6 +9023,10 @@
             <a:prstDash val="solid"/>
           </a:ln>
         </p:spPr>
+        <p:txBody>
+          <a:bodyPr/>
+          <a:p/>
+        </p:txBody>
       </p:sp>
       <p:pic>
         <p:nvPicPr>
@@ -9013,8 +9044,8 @@
         </p:blipFill>
         <p:spPr>
           <a:xfrm>
-            <a:off x="6095365" y="1078230"/>
-            <a:ext cx="5517515" cy="3757930"/>
+            <a:off x="6095365" y="1422080"/>
+            <a:ext cx="5517515" cy="3070230"/>
           </a:xfrm>
           <a:prstGeom prst="rect">
             <a:avLst/>
@@ -9093,6 +9124,10 @@
               <a:srgbClr val="16283A"/>
             </a:solidFill>
           </p:spPr>
+          <p:txBody>
+            <a:bodyPr/>
+            <a:p/>
+          </p:txBody>
         </p:sp>
         <p:sp>
           <p:nvSpPr>
@@ -9137,7 +9172,7 @@
                   <a:ea typeface="Calibri" panose="020F0502020204030204" pitchFamily="34" charset="-122"/>
                   <a:cs typeface="Calibri" panose="020F0502020204030204" pitchFamily="34" charset="-120"/>
                 </a:rPr>
-                <a:t>chọn model &amp; ngưỡng 'như ở B' mà KHÔNG nhìn nhãn B. ESS ≈ 25,5% → coi các bản đầu bảng là ngang nhau.</a:t>
+                <a:t>chọn model &amp; ngưỡng 'như ở B' mà KHÔNG nhìn nhãn B. ESS ≈ 24,2% → coi các bản đầu bảng là ngang nhau.</a:t>
               </a:r>
               <a:endParaRPr lang="en-US" sz="1250" dirty="0"/>
             </a:p>
@@ -10333,7 +10368,7 @@
                           <a:ea typeface="Calibri" panose="020F0502020204030204" pitchFamily="34" charset="-122"/>
                           <a:cs typeface="Calibri" panose="020F0502020204030204" pitchFamily="34" charset="-120"/>
                         </a:rPr>
-                        <a:t>+ 3 đặc trưng vật lý</a:t>
+                        <a:t>+ 4 đặc trưng vật lý</a:t>
                       </a:r>
                       <a:endParaRPr lang="en-US" sz="1200" dirty="0">
                         <a:latin typeface="Calibri" panose="020F0502020204030204" pitchFamily="34" charset="0"/>
@@ -10401,7 +10436,7 @@
                           <a:ea typeface="Calibri" panose="020F0502020204030204" pitchFamily="34" charset="-122"/>
                           <a:cs typeface="Calibri" panose="020F0502020204030204" pitchFamily="34" charset="-120"/>
                         </a:rPr>
-                        <a:t>0,852</a:t>
+                        <a:t>0,873</a:t>
                       </a:r>
                       <a:endParaRPr lang="en-US" sz="1200" dirty="0">
                         <a:latin typeface="Calibri" panose="020F0502020204030204" pitchFamily="34" charset="0"/>
@@ -10469,7 +10504,7 @@
                           <a:ea typeface="Calibri" panose="020F0502020204030204" pitchFamily="34" charset="-122"/>
                           <a:cs typeface="Calibri" panose="020F0502020204030204" pitchFamily="34" charset="-120"/>
                         </a:rPr>
-                        <a:t>0,501</a:t>
+                        <a:t>0,645</a:t>
                       </a:r>
                       <a:endParaRPr lang="en-US" sz="1200" dirty="0">
                         <a:latin typeface="Calibri" panose="020F0502020204030204" pitchFamily="34" charset="0"/>
@@ -10537,7 +10572,7 @@
                           <a:ea typeface="Calibri" panose="020F0502020204030204" pitchFamily="34" charset="-122"/>
                           <a:cs typeface="Calibri" panose="020F0502020204030204" pitchFamily="34" charset="-120"/>
                         </a:rPr>
-                        <a:t>0,352</a:t>
+                        <a:t>0,716</a:t>
                       </a:r>
                       <a:endParaRPr lang="en-US" sz="1200" dirty="0">
                         <a:latin typeface="Calibri" panose="020F0502020204030204" pitchFamily="34" charset="0"/>
@@ -10605,7 +10640,7 @@
                           <a:ea typeface="Calibri" panose="020F0502020204030204" pitchFamily="34" charset="-122"/>
                           <a:cs typeface="Calibri" panose="020F0502020204030204" pitchFamily="34" charset="-120"/>
                         </a:rPr>
-                        <a:t>0,22</a:t>
+                        <a:t>0,73</a:t>
                       </a:r>
                       <a:endParaRPr lang="en-US" sz="1200" dirty="0">
                         <a:latin typeface="Calibri" panose="020F0502020204030204" pitchFamily="34" charset="0"/>
@@ -10673,7 +10708,7 @@
                           <a:ea typeface="Calibri" panose="020F0502020204030204" pitchFamily="34" charset="-122"/>
                           <a:cs typeface="Calibri" panose="020F0502020204030204" pitchFamily="34" charset="-120"/>
                         </a:rPr>
-                        <a:t>0,82</a:t>
+                        <a:t>0,70</a:t>
                       </a:r>
                       <a:endParaRPr lang="en-US" sz="1200" dirty="0">
                         <a:latin typeface="Calibri" panose="020F0502020204030204" pitchFamily="34" charset="0"/>
@@ -10811,7 +10846,7 @@
                           <a:ea typeface="Calibri" panose="020F0502020204030204" pitchFamily="34" charset="-122"/>
                           <a:cs typeface="Calibri" panose="020F0502020204030204" pitchFamily="34" charset="-120"/>
                         </a:rPr>
-                        <a:t>0,873</a:t>
+                        <a:t>0,872</a:t>
                       </a:r>
                       <a:endParaRPr lang="en-US" sz="1200" dirty="0">
                         <a:latin typeface="Calibri" panose="020F0502020204030204" pitchFamily="34" charset="0"/>
@@ -10879,7 +10914,7 @@
                           <a:ea typeface="Calibri" panose="020F0502020204030204" pitchFamily="34" charset="-122"/>
                           <a:cs typeface="Calibri" panose="020F0502020204030204" pitchFamily="34" charset="-120"/>
                         </a:rPr>
-                        <a:t>0,672</a:t>
+                        <a:t>0,675</a:t>
                       </a:r>
                       <a:endParaRPr lang="en-US" sz="1200" dirty="0">
                         <a:latin typeface="Calibri" panose="020F0502020204030204" pitchFamily="34" charset="0"/>
@@ -10947,7 +10982,7 @@
                           <a:ea typeface="Calibri" panose="020F0502020204030204" pitchFamily="34" charset="-122"/>
                           <a:cs typeface="Calibri" panose="020F0502020204030204" pitchFamily="34" charset="-120"/>
                         </a:rPr>
-                        <a:t>0,769</a:t>
+                        <a:t>0,783</a:t>
                       </a:r>
                       <a:endParaRPr lang="en-US" sz="1200" dirty="0">
                         <a:latin typeface="Calibri" panose="020F0502020204030204" pitchFamily="34" charset="0"/>
@@ -11015,7 +11050,7 @@
                           <a:ea typeface="Calibri" panose="020F0502020204030204" pitchFamily="34" charset="-122"/>
                           <a:cs typeface="Calibri" panose="020F0502020204030204" pitchFamily="34" charset="-120"/>
                         </a:rPr>
-                        <a:t>0,78</a:t>
+                        <a:t>0,81</a:t>
                       </a:r>
                       <a:endParaRPr lang="en-US" sz="1200" dirty="0">
                         <a:latin typeface="Calibri" panose="020F0502020204030204" pitchFamily="34" charset="0"/>
@@ -11083,7 +11118,7 @@
                           <a:ea typeface="Calibri" panose="020F0502020204030204" pitchFamily="34" charset="-122"/>
                           <a:cs typeface="Calibri" panose="020F0502020204030204" pitchFamily="34" charset="-120"/>
                         </a:rPr>
-                        <a:t>0,76</a:t>
+                        <a:t>0,75</a:t>
                       </a:r>
                       <a:endParaRPr lang="en-US" sz="1200" dirty="0">
                         <a:latin typeface="Calibri" panose="020F0502020204030204" pitchFamily="34" charset="0"/>
@@ -11221,7 +11256,7 @@
                           <a:ea typeface="Calibri" panose="020F0502020204030204" pitchFamily="34" charset="-122"/>
                           <a:cs typeface="Calibri" panose="020F0502020204030204" pitchFamily="34" charset="-120"/>
                         </a:rPr>
-                        <a:t>0,870</a:t>
+                        <a:t>0,874</a:t>
                       </a:r>
                       <a:endParaRPr lang="en-US" sz="1200" dirty="0">
                         <a:latin typeface="Calibri" panose="020F0502020204030204" pitchFamily="34" charset="0"/>
@@ -11289,7 +11324,7 @@
                           <a:ea typeface="Calibri" panose="020F0502020204030204" pitchFamily="34" charset="-122"/>
                           <a:cs typeface="Calibri" panose="020F0502020204030204" pitchFamily="34" charset="-120"/>
                         </a:rPr>
-                        <a:t>0,664</a:t>
+                        <a:t>0,649</a:t>
                       </a:r>
                       <a:endParaRPr lang="en-US" sz="1200" dirty="0">
                         <a:latin typeface="Calibri" panose="020F0502020204030204" pitchFamily="34" charset="0"/>
@@ -11357,7 +11392,7 @@
                           <a:ea typeface="Calibri" panose="020F0502020204030204" pitchFamily="34" charset="-122"/>
                           <a:cs typeface="Calibri" panose="020F0502020204030204" pitchFamily="34" charset="-120"/>
                         </a:rPr>
-                        <a:t>0,773</a:t>
+                        <a:t>0,767</a:t>
                       </a:r>
                       <a:endParaRPr lang="en-US" sz="1200" dirty="0">
                         <a:latin typeface="Calibri" panose="020F0502020204030204" pitchFamily="34" charset="0"/>
@@ -11493,7 +11528,7 @@
                           <a:ea typeface="Calibri" panose="020F0502020204030204" pitchFamily="34" charset="-122"/>
                           <a:cs typeface="Calibri" panose="020F0502020204030204" pitchFamily="34" charset="-120"/>
                         </a:rPr>
-                        <a:t>0,76</a:t>
+                        <a:t>0,75</a:t>
                       </a:r>
                       <a:endParaRPr lang="en-US" sz="1200" dirty="0">
                         <a:latin typeface="Calibri" panose="020F0502020204030204" pitchFamily="34" charset="0"/>
@@ -11631,7 +11666,7 @@
                           <a:ea typeface="Calibri" panose="020F0502020204030204" pitchFamily="34" charset="-122"/>
                           <a:cs typeface="Calibri" panose="020F0502020204030204" pitchFamily="34" charset="-120"/>
                         </a:rPr>
-                        <a:t>0,868</a:t>
+                        <a:t>0,869</a:t>
                       </a:r>
                       <a:endParaRPr lang="en-US" sz="1200" dirty="0">
                         <a:latin typeface="Calibri" panose="020F0502020204030204" pitchFamily="34" charset="0"/>
@@ -11699,7 +11734,7 @@
                           <a:ea typeface="Calibri" panose="020F0502020204030204" pitchFamily="34" charset="-122"/>
                           <a:cs typeface="Calibri" panose="020F0502020204030204" pitchFamily="34" charset="-120"/>
                         </a:rPr>
-                        <a:t>0,662</a:t>
+                        <a:t>0,666</a:t>
                       </a:r>
                       <a:endParaRPr lang="en-US" sz="1200" dirty="0">
                         <a:latin typeface="Calibri" panose="020F0502020204030204" pitchFamily="34" charset="0"/>
@@ -11767,7 +11802,7 @@
                           <a:ea typeface="Calibri" panose="020F0502020204030204" pitchFamily="34" charset="-122"/>
                           <a:cs typeface="Calibri" panose="020F0502020204030204" pitchFamily="34" charset="-120"/>
                         </a:rPr>
-                        <a:t>0,693</a:t>
+                        <a:t>0,738</a:t>
                       </a:r>
                       <a:endParaRPr lang="en-US" sz="1200" dirty="0">
                         <a:latin typeface="Calibri" panose="020F0502020204030204" pitchFamily="34" charset="0"/>
@@ -11903,7 +11938,7 @@
                           <a:ea typeface="Calibri" panose="020F0502020204030204" pitchFamily="34" charset="-122"/>
                           <a:cs typeface="Calibri" panose="020F0502020204030204" pitchFamily="34" charset="-120"/>
                         </a:rPr>
-                        <a:t>0,61</a:t>
+                        <a:t>0,68</a:t>
                       </a:r>
                       <a:endParaRPr lang="en-US" sz="1200" dirty="0">
                         <a:latin typeface="Calibri" panose="020F0502020204030204" pitchFamily="34" charset="0"/>
@@ -12041,7 +12076,7 @@
                           <a:ea typeface="Calibri" panose="020F0502020204030204" pitchFamily="34" charset="-122"/>
                           <a:cs typeface="Calibri" panose="020F0502020204030204" pitchFamily="34" charset="-120"/>
                         </a:rPr>
-                        <a:t>0,868</a:t>
+                        <a:t>0,870</a:t>
                       </a:r>
                       <a:endParaRPr lang="en-US" sz="1200" dirty="0">
                         <a:latin typeface="Calibri" panose="020F0502020204030204" pitchFamily="34" charset="0"/>
@@ -12109,7 +12144,7 @@
                           <a:ea typeface="Calibri" panose="020F0502020204030204" pitchFamily="34" charset="-122"/>
                           <a:cs typeface="Calibri" panose="020F0502020204030204" pitchFamily="34" charset="-120"/>
                         </a:rPr>
-                        <a:t>0,672</a:t>
+                        <a:t>0,671</a:t>
                       </a:r>
                       <a:endParaRPr lang="en-US" sz="1200" dirty="0">
                         <a:latin typeface="Calibri" panose="020F0502020204030204" pitchFamily="34" charset="0"/>
@@ -12177,7 +12212,7 @@
                           <a:ea typeface="Calibri" panose="020F0502020204030204" pitchFamily="34" charset="-122"/>
                           <a:cs typeface="Calibri" panose="020F0502020204030204" pitchFamily="34" charset="-120"/>
                         </a:rPr>
-                        <a:t>0,773</a:t>
+                        <a:t>0,783</a:t>
                       </a:r>
                       <a:endParaRPr lang="en-US" sz="1200" dirty="0">
                         <a:latin typeface="Calibri" panose="020F0502020204030204" pitchFamily="34" charset="0"/>
@@ -12245,7 +12280,7 @@
                           <a:ea typeface="Calibri" panose="020F0502020204030204" pitchFamily="34" charset="-122"/>
                           <a:cs typeface="Calibri" panose="020F0502020204030204" pitchFamily="34" charset="-120"/>
                         </a:rPr>
-                        <a:t>0,79</a:t>
+                        <a:t>0,81</a:t>
                       </a:r>
                       <a:endParaRPr lang="en-US" sz="1200" dirty="0">
                         <a:latin typeface="Calibri" panose="020F0502020204030204" pitchFamily="34" charset="0"/>
@@ -12313,7 +12348,7 @@
                           <a:ea typeface="Calibri" panose="020F0502020204030204" pitchFamily="34" charset="-122"/>
                           <a:cs typeface="Calibri" panose="020F0502020204030204" pitchFamily="34" charset="-120"/>
                         </a:rPr>
-                        <a:t>0,76</a:t>
+                        <a:t>0,75</a:t>
                       </a:r>
                       <a:endParaRPr lang="en-US" sz="1200" dirty="0">
                         <a:latin typeface="Calibri" panose="020F0502020204030204" pitchFamily="34" charset="0"/>
@@ -12451,7 +12486,7 @@
                           <a:ea typeface="Calibri" panose="020F0502020204030204" pitchFamily="34" charset="-122"/>
                           <a:cs typeface="Calibri" panose="020F0502020204030204" pitchFamily="34" charset="-120"/>
                         </a:rPr>
-                        <a:t>0,868</a:t>
+                        <a:t>0,870</a:t>
                       </a:r>
                       <a:endParaRPr lang="en-US" sz="1200" dirty="0">
                         <a:latin typeface="Calibri" panose="020F0502020204030204" pitchFamily="34" charset="0"/>
@@ -12519,7 +12554,7 @@
                           <a:ea typeface="Calibri" panose="020F0502020204030204" pitchFamily="34" charset="-122"/>
                           <a:cs typeface="Calibri" panose="020F0502020204030204" pitchFamily="34" charset="-120"/>
                         </a:rPr>
-                        <a:t>0,672</a:t>
+                        <a:t>0,671</a:t>
                       </a:r>
                       <a:endParaRPr lang="en-US" sz="1200" dirty="0">
                         <a:latin typeface="Calibri" panose="020F0502020204030204" pitchFamily="34" charset="0"/>
@@ -12587,7 +12622,7 @@
                           <a:ea typeface="Calibri" panose="020F0502020204030204" pitchFamily="34" charset="-122"/>
                           <a:cs typeface="Calibri" panose="020F0502020204030204" pitchFamily="34" charset="-120"/>
                         </a:rPr>
-                        <a:t>0,774</a:t>
+                        <a:t>0,783</a:t>
                       </a:r>
                       <a:endParaRPr lang="en-US" sz="1200" dirty="0">
                         <a:latin typeface="Calibri" panose="020F0502020204030204" pitchFamily="34" charset="0"/>
@@ -12655,7 +12690,7 @@
                           <a:ea typeface="Calibri" panose="020F0502020204030204" pitchFamily="34" charset="-122"/>
                           <a:cs typeface="Calibri" panose="020F0502020204030204" pitchFamily="34" charset="-120"/>
                         </a:rPr>
-                        <a:t>0,81</a:t>
+                        <a:t>0,82</a:t>
                       </a:r>
                       <a:endParaRPr lang="en-US" sz="1200" dirty="0">
                         <a:latin typeface="Calibri" panose="020F0502020204030204" pitchFamily="34" charset="0"/>
@@ -12723,7 +12758,7 @@
                           <a:ea typeface="Calibri" panose="020F0502020204030204" pitchFamily="34" charset="-122"/>
                           <a:cs typeface="Calibri" panose="020F0502020204030204" pitchFamily="34" charset="-120"/>
                         </a:rPr>
-                        <a:t>0,74</a:t>
+                        <a:t>0,75</a:t>
                       </a:r>
                       <a:endParaRPr lang="en-US" sz="1200" dirty="0">
                         <a:latin typeface="Calibri" panose="020F0502020204030204" pitchFamily="34" charset="0"/>
@@ -12929,7 +12964,7 @@
                           <a:ea typeface="Calibri" panose="020F0502020204030204" pitchFamily="34" charset="-122"/>
                           <a:cs typeface="Calibri" panose="020F0502020204030204" pitchFamily="34" charset="-120"/>
                         </a:rPr>
-                        <a:t>0,670</a:t>
+                        <a:t>0,666</a:t>
                       </a:r>
                       <a:endParaRPr lang="en-US" sz="1200" dirty="0">
                         <a:latin typeface="Calibri" panose="020F0502020204030204" pitchFamily="34" charset="0"/>
@@ -12997,7 +13032,7 @@
                           <a:ea typeface="Calibri" panose="020F0502020204030204" pitchFamily="34" charset="-122"/>
                           <a:cs typeface="Calibri" panose="020F0502020204030204" pitchFamily="34" charset="-120"/>
                         </a:rPr>
-                        <a:t>0,781</a:t>
+                        <a:t>0,783</a:t>
                       </a:r>
                       <a:endParaRPr lang="en-US" sz="1200" dirty="0">
                         <a:latin typeface="Calibri" panose="020F0502020204030204" pitchFamily="34" charset="0"/>
@@ -13065,7 +13100,7 @@
                           <a:ea typeface="Calibri" panose="020F0502020204030204" pitchFamily="34" charset="-122"/>
                           <a:cs typeface="Calibri" panose="020F0502020204030204" pitchFamily="34" charset="-120"/>
                         </a:rPr>
-                        <a:t>0,81</a:t>
+                        <a:t>0,82</a:t>
                       </a:r>
                       <a:endParaRPr lang="en-US" sz="1200" dirty="0">
                         <a:latin typeface="Calibri" panose="020F0502020204030204" pitchFamily="34" charset="0"/>
@@ -13215,6 +13250,10 @@
             <a:prstDash val="solid"/>
           </a:ln>
         </p:spPr>
+        <p:txBody>
+          <a:bodyPr/>
+          <a:p/>
+        </p:txBody>
       </p:sp>
       <p:sp>
         <p:nvSpPr>
@@ -13259,7 +13298,7 @@
                 <a:ea typeface="Calibri" panose="020F0502020204030204" pitchFamily="34" charset="-122"/>
                 <a:cs typeface="Calibri" panose="020F0502020204030204" pitchFamily="34" charset="-120"/>
               </a:rPr>
-              <a:t>F1 là con số so sánh chính (theo đề). Từ 0,231 → 0,781 = gấp 3,4 lần. 'Báo đúng' = Precision; 'Bắt được' = Recall.</a:t>
+              <a:t>F1 là con số so sánh chính (theo đề). Từ 0,231 → 0,783 = gấp 3,4 lần. 'Báo đúng' = Precision; 'Bắt được' = Recall.</a:t>
             </a:r>
             <a:endParaRPr lang="en-US" sz="1400" dirty="0"/>
           </a:p>
@@ -13431,7 +13470,7 @@
                 <a:ea typeface="Calibri" panose="020F0502020204030204" pitchFamily="34" charset="-122"/>
                 <a:cs typeface="Calibri" panose="020F0502020204030204" pitchFamily="34" charset="-120"/>
               </a:rPr>
-              <a:t>Cách 1 — Bỏ phiếu (Voting): trung bình Random Forest + XGBoost (mỗi cái 50%).</a:t>
+              <a:t>Cách 1 — Bỏ phiếu (Voting): trung bình có trọng số RF 25% + ExtraTrees 25% + XGBoost 50% (trọng số dò bằng IWV).</a:t>
             </a:r>
             <a:endParaRPr lang="en-US" sz="1550" dirty="0"/>
           </a:p>
@@ -13494,7 +13533,7 @@
                 <a:ea typeface="Calibri" panose="020F0502020204030204" pitchFamily="34" charset="-122"/>
                 <a:cs typeface="Calibri" panose="020F0502020204030204" pitchFamily="34" charset="-120"/>
               </a:rPr>
-              <a:t>Giữ cả 2 để 'không đặt hết cược một cửa' (Stacking nghiêng nặng XGB — cái dễ gãy trên B).</a:t>
+              <a:t>Giữ cả 2 để 'không đặt hết cược một cửa'; IWV chấm hai bản ngang điểm → chọn bản đơn giản hơn.</a:t>
             </a:r>
             <a:endParaRPr lang="en-US" sz="1550" dirty="0"/>
           </a:p>
@@ -13526,6 +13565,10 @@
             <a:prstDash val="solid"/>
           </a:ln>
         </p:spPr>
+        <p:txBody>
+          <a:bodyPr/>
+          <a:p/>
+        </p:txBody>
       </p:sp>
       <p:sp>
         <p:nvSpPr>
@@ -13582,7 +13625,7 @@
                 <a:ea typeface="Calibri" panose="020F0502020204030204" pitchFamily="34" charset="-122"/>
                 <a:cs typeface="Calibri" panose="020F0502020204030204" pitchFamily="34" charset="-120"/>
               </a:rPr>
-              <a:t>Random Forest 50%</a:t>
+              <a:t>RF 25% + ExtraTrees 25%</a:t>
             </a:r>
             <a:endParaRPr lang="en-US" sz="1600" dirty="0"/>
           </a:p>
@@ -13714,6 +13757,10 @@
             <a:srgbClr val="1F8A8C"/>
           </a:solidFill>
         </p:spPr>
+        <p:txBody>
+          <a:bodyPr/>
+          <a:p/>
+        </p:txBody>
       </p:sp>
       <p:sp>
         <p:nvSpPr>
@@ -13869,6 +13916,10 @@
             <a:srgbClr val="F2A104"/>
           </a:solidFill>
         </p:spPr>
+        <p:txBody>
+          <a:bodyPr/>
+          <a:p/>
+        </p:txBody>
       </p:sp>
       <p:sp>
         <p:nvSpPr>
@@ -13934,6 +13985,10 @@
             <a:prstDash val="solid"/>
           </a:ln>
         </p:spPr>
+        <p:txBody>
+          <a:bodyPr/>
+          <a:p/>
+        </p:txBody>
       </p:sp>
       <p:sp>
         <p:nvSpPr>
@@ -14018,6 +14073,10 @@
             <a:srgbClr val="C4444E"/>
           </a:solidFill>
         </p:spPr>
+        <p:txBody>
+          <a:bodyPr/>
+          <a:p/>
+        </p:txBody>
       </p:sp>
       <p:sp>
         <p:nvSpPr>
@@ -14083,6 +14142,10 @@
             <a:prstDash val="solid"/>
           </a:ln>
         </p:spPr>
+        <p:txBody>
+          <a:bodyPr/>
+          <a:p/>
+        </p:txBody>
       </p:sp>
       <p:sp>
         <p:nvSpPr>
@@ -14167,6 +14230,10 @@
             <a:srgbClr val="2E8B57"/>
           </a:solidFill>
         </p:spPr>
+        <p:txBody>
+          <a:bodyPr/>
+          <a:p/>
+        </p:txBody>
       </p:sp>
       <p:sp>
         <p:nvSpPr>
@@ -14232,6 +14299,10 @@
             <a:prstDash val="solid"/>
           </a:ln>
         </p:spPr>
+        <p:txBody>
+          <a:bodyPr/>
+          <a:p/>
+        </p:txBody>
       </p:sp>
       <p:sp>
         <p:nvSpPr>
@@ -14376,6 +14447,10 @@
             <a:srgbClr val="16283A"/>
           </a:solidFill>
         </p:spPr>
+        <p:txBody>
+          <a:bodyPr/>
+          <a:p/>
+        </p:txBody>
       </p:sp>
       <p:sp>
         <p:nvSpPr>
@@ -14397,6 +14472,10 @@
             <a:srgbClr val="2E8B57"/>
           </a:solidFill>
         </p:spPr>
+        <p:txBody>
+          <a:bodyPr/>
+          <a:p/>
+        </p:txBody>
       </p:sp>
       <p:sp>
         <p:nvSpPr>
@@ -14615,7 +14694,7 @@
                 <a:ea typeface="Cambria" panose="02040503050406030204" pitchFamily="34" charset="-122"/>
                 <a:cs typeface="Cambria" panose="02040503050406030204" pitchFamily="34" charset="-120"/>
               </a:rPr>
-              <a:t>0,781</a:t>
+              <a:t>0,783</a:t>
             </a:r>
             <a:endParaRPr lang="en-US" sz="4000" dirty="0"/>
           </a:p>
@@ -14853,6 +14932,10 @@
             <a:prstDash val="solid"/>
           </a:ln>
         </p:spPr>
+        <p:txBody>
+          <a:bodyPr/>
+          <a:p/>
+        </p:txBody>
       </p:sp>
       <p:pic>
         <p:nvPicPr>
@@ -14981,7 +15064,7 @@
                 <a:ea typeface="Cambria" panose="02040503050406030204" pitchFamily="34" charset="-122"/>
                 <a:cs typeface="Cambria" panose="02040503050406030204" pitchFamily="34" charset="-120"/>
               </a:rPr>
-              <a:t>Ma trận nhầm lẫn — bản chốt v6 (ngưỡng 0,705)</a:t>
+              <a:t>Ma trận nhầm lẫn — bản chốt v6 (ngưỡng 0,585)</a:t>
             </a:r>
             <a:endParaRPr lang="en-US" sz="2700" dirty="0"/>
           </a:p>
@@ -15045,6 +15128,10 @@
             <a:srgbClr val="2E8B57"/>
           </a:solidFill>
         </p:spPr>
+        <p:txBody>
+          <a:bodyPr/>
+          <a:p/>
+        </p:txBody>
       </p:sp>
       <p:sp>
         <p:nvSpPr>
@@ -15116,6 +15203,10 @@
             <a:srgbClr val="F2A104"/>
           </a:solidFill>
         </p:spPr>
+        <p:txBody>
+          <a:bodyPr/>
+          <a:p/>
+        </p:txBody>
       </p:sp>
       <p:sp>
         <p:nvSpPr>
@@ -15187,6 +15278,10 @@
             <a:srgbClr val="C4444E"/>
           </a:solidFill>
         </p:spPr>
+        <p:txBody>
+          <a:bodyPr/>
+          <a:p/>
+        </p:txBody>
       </p:sp>
       <p:sp>
         <p:nvSpPr>
@@ -15258,6 +15353,10 @@
             <a:srgbClr val="1F8A8C"/>
           </a:solidFill>
         </p:spPr>
+        <p:txBody>
+          <a:bodyPr/>
+          <a:p/>
+        </p:txBody>
       </p:sp>
       <p:sp>
         <p:nvSpPr>
@@ -15373,6 +15472,10 @@
             <a:prstDash val="solid"/>
           </a:ln>
         </p:spPr>
+        <p:txBody>
+          <a:bodyPr/>
+          <a:p/>
+        </p:txBody>
       </p:sp>
       <p:sp>
         <p:nvSpPr>
@@ -15486,7 +15589,7 @@
                 <a:ea typeface="Calibri" panose="020F0502020204030204" pitchFamily="34" charset="-122"/>
                 <a:cs typeface="Calibri" panose="020F0502020204030204" pitchFamily="34" charset="-120"/>
               </a:rPr>
-              <a:t>Ở ngưỡng 0,705: Recall ~75%, Precision ~81%. Vì FN đắt hơn → có thể hạ ngưỡng để tăng Recall.</a:t>
+              <a:t>Ở ngưỡng 0,585: Recall ~75%, Precision ~82%. Vì FN đắt hơn → có thể hạ ngưỡng để tăng Recall.</a:t>
             </a:r>
             <a:endParaRPr lang="en-US" sz="1500" dirty="0"/>
           </a:p>
@@ -15557,7 +15660,7 @@
                 <a:ea typeface="Cambria" panose="02040503050406030204" pitchFamily="34" charset="-122"/>
                 <a:cs typeface="Cambria" panose="02040503050406030204" pitchFamily="34" charset="-120"/>
               </a:rPr>
-              <a:t>Con số 0,781 có chắc chắn không? (bootstrap)</a:t>
+              <a:t>Con số 0,783 có chắc chắn không? (bootstrap)</a:t>
             </a:r>
             <a:endParaRPr lang="en-US" sz="2700" dirty="0"/>
           </a:p>
@@ -15641,7 +15744,7 @@
                 <a:ea typeface="Calibri" panose="020F0502020204030204" pitchFamily="34" charset="-122"/>
                 <a:cs typeface="Calibri" panose="020F0502020204030204" pitchFamily="34" charset="-120"/>
               </a:rPr>
-              <a:t>F1 = 0,781, khoảng tin cậy 95% = [0,751 ; 0,809].</a:t>
+              <a:t>F1 = 0,783, khoảng tin cậy 95% = [0,753 ; 0,811].</a:t>
             </a:r>
             <a:endParaRPr lang="en-US" sz="1550" dirty="0"/>
           </a:p>
@@ -15662,7 +15765,7 @@
                 <a:ea typeface="Calibri" panose="020F0502020204030204" pitchFamily="34" charset="-122"/>
                 <a:cs typeface="Calibri" panose="020F0502020204030204" pitchFamily="34" charset="-120"/>
               </a:rPr>
-              <a:t>Các bản đầu bảng (0,769–0,781) chênh rất nhỏ → coi như ngang nhau, KHÔNG khoe hơn-kém.</a:t>
+              <a:t>Các bản đầu bảng (0,767–0,783) chênh rất nhỏ → coi như ngang nhau, KHÔNG khoe hơn-kém.</a:t>
             </a:r>
             <a:endParaRPr lang="en-US" sz="1550" dirty="0"/>
           </a:p>
@@ -15683,7 +15786,7 @@
                 <a:ea typeface="Calibri" panose="020F0502020204030204" pitchFamily="34" charset="-122"/>
                 <a:cs typeface="Calibri" panose="020F0502020204030204" pitchFamily="34" charset="-120"/>
               </a:rPr>
-              <a:t>So trực tiếp từng lần: bản gộp thắng bản đơn 99,8% số lần → nhỉnh đều nhưng biên độ nhỏ.</a:t>
+              <a:t>So trực tiếp từng lần: bản gộp thắng bản đơn 100% số lần (chênh +0,015) → nhỉnh đều nhưng biên độ nhỏ.</a:t>
             </a:r>
             <a:endParaRPr lang="en-US" sz="1550" dirty="0"/>
           </a:p>
@@ -15715,6 +15818,10 @@
             <a:prstDash val="solid"/>
           </a:ln>
         </p:spPr>
+        <p:txBody>
+          <a:bodyPr/>
+          <a:p/>
+        </p:txBody>
       </p:sp>
       <p:pic>
         <p:nvPicPr>
@@ -15804,6 +15911,10 @@
             <a:prstDash val="solid"/>
           </a:ln>
         </p:spPr>
+        <p:txBody>
+          <a:bodyPr/>
+          <a:p/>
+        </p:txBody>
       </p:sp>
       <p:sp>
         <p:nvSpPr>
@@ -15840,7 +15951,7 @@
                 <a:ea typeface="Calibri" panose="020F0502020204030204" pitchFamily="34" charset="-122"/>
                 <a:cs typeface="Calibri" panose="020F0502020204030204" pitchFamily="34" charset="-120"/>
               </a:rPr>
-              <a:t>F1 = 0,781</a:t>
+              <a:t>F1 = 0,783</a:t>
             </a:r>
             <a:endParaRPr lang="en-US" sz="2200" dirty="0"/>
           </a:p>
@@ -15860,7 +15971,7 @@
                 <a:ea typeface="Calibri" panose="020F0502020204030204" pitchFamily="34" charset="-122"/>
                 <a:cs typeface="Calibri" panose="020F0502020204030204" pitchFamily="34" charset="-120"/>
               </a:rPr>
-              <a:t>95% CI [0,751 ; 0,809]</a:t>
+              <a:t>95% CI [0,753 ; 0,811]</a:t>
             </a:r>
             <a:endParaRPr lang="en-US" sz="2200" dirty="0"/>
           </a:p>
@@ -16102,6 +16213,10 @@
             <a:prstDash val="solid"/>
           </a:ln>
         </p:spPr>
+        <p:txBody>
+          <a:bodyPr/>
+          <a:p/>
+        </p:txBody>
       </p:sp>
       <p:sp>
         <p:nvSpPr>
@@ -16356,6 +16471,10 @@
             <a:prstDash val="solid"/>
           </a:ln>
         </p:spPr>
+        <p:txBody>
+          <a:bodyPr/>
+          <a:p/>
+        </p:txBody>
       </p:sp>
       <p:sp>
         <p:nvSpPr>
@@ -16452,7 +16571,7 @@
                 <a:ea typeface="Calibri" panose="020F0502020204030204" pitchFamily="34" charset="-122"/>
                 <a:cs typeface="Calibri" panose="020F0502020204030204" pitchFamily="34" charset="-120"/>
               </a:rPr>
-              <a:t>• Độ tin IWV giới hạn (ESS 25,5%).</a:t>
+              <a:t>• Độ tin IWV giới hạn (ESS 24,2%).</a:t>
             </a:r>
             <a:endParaRPr lang="en-US" sz="1500" dirty="0"/>
           </a:p>
@@ -16469,7 +16588,7 @@
                 <a:ea typeface="Calibri" panose="020F0502020204030204" pitchFamily="34" charset="-122"/>
                 <a:cs typeface="Calibri" panose="020F0502020204030204" pitchFamily="34" charset="-120"/>
               </a:rPr>
-              <a:t>• Chỉ 5 số đo, nhãn theo luật gần cố định → có 'trần' hiệu năng.</a:t>
+              <a:t>• Chỉ 5 số đo; ~25% ca hỏng là nhiễu ngẫu nhiên → trần F1 ≈ 0,78 (đã định lượng).</a:t>
             </a:r>
             <a:endParaRPr lang="en-US" sz="1500" dirty="0"/>
           </a:p>
@@ -16501,6 +16620,10 @@
             <a:prstDash val="solid"/>
           </a:ln>
         </p:spPr>
+        <p:txBody>
+          <a:bodyPr/>
+          <a:p/>
+        </p:txBody>
       </p:sp>
       <p:sp>
         <p:nvSpPr>
@@ -16557,7 +16680,7 @@
                 <a:ea typeface="Calibri" panose="020F0502020204030204" pitchFamily="34" charset="-122"/>
                 <a:cs typeface="Calibri" panose="020F0502020204030204" pitchFamily="34" charset="-120"/>
               </a:rPr>
-              <a:t>• Hiệu chỉnh lại ngưỡng công suất cho chính xác hơn.</a:t>
+              <a:t>• ✔ ĐÃ LÀM: khôi phục luật sinh nhãn từ A (PWF/OSF mới + TWF mòn&gt;244) → precision luật 0,26→0,81, F1 0,781→0,783.</a:t>
             </a:r>
             <a:endParaRPr lang="en-US" sz="1500" dirty="0"/>
           </a:p>
@@ -17081,7 +17204,7 @@
                           <a:ea typeface="Calibri" panose="020F0502020204030204" pitchFamily="34" charset="-122"/>
                           <a:cs typeface="Calibri" panose="020F0502020204030204" pitchFamily="34" charset="-120"/>
                         </a:rPr>
-                        <a:t>3 đặc trưng neo ngưỡng vật lý</a:t>
+                        <a:t>4 đặc trưng neo ngưỡng cơ chế (khôi phục từ A)</a:t>
                       </a:r>
                       <a:endParaRPr lang="en-US" sz="1250" dirty="0">
                         <a:latin typeface="Calibri" panose="020F0502020204030204" pitchFamily="34" charset="0"/>
@@ -17149,7 +17272,7 @@
                           <a:ea typeface="Calibri" panose="020F0502020204030204" pitchFamily="34" charset="-122"/>
                           <a:cs typeface="Calibri" panose="020F0502020204030204" pitchFamily="34" charset="-120"/>
                         </a:rPr>
-                        <a:t>hằng số cơ chế bất biến A↔B (PSI≈0, drift-AUC 0,51)</a:t>
+                        <a:t>hằng số cơ chế bất biến A↔B (PSI≈0, drift-AUC 0,53)</a:t>
                       </a:r>
                       <a:endParaRPr lang="en-US" sz="1250" dirty="0">
                         <a:latin typeface="Calibri" panose="020F0502020204030204" pitchFamily="34" charset="0"/>
@@ -17701,7 +17824,7 @@
                           <a:ea typeface="Calibri" panose="020F0502020204030204" pitchFamily="34" charset="-122"/>
                           <a:cs typeface="Calibri" panose="020F0502020204030204" pitchFamily="34" charset="-120"/>
                         </a:rPr>
-                        <a:t>w thô nổ tới ~57 → chặn vài mẫu cá biệt chi phối</a:t>
+                        <a:t>w thô nổ tới ~77 → chặn vài mẫu cá biệt chi phối</a:t>
                       </a:r>
                       <a:endParaRPr lang="en-US" sz="1250" dirty="0">
                         <a:latin typeface="Calibri" panose="020F0502020204030204" pitchFamily="34" charset="0"/>
@@ -17771,7 +17894,7 @@
                           <a:ea typeface="Calibri" panose="020F0502020204030204" pitchFamily="34" charset="-122"/>
                           <a:cs typeface="Calibri" panose="020F0502020204030204" pitchFamily="34" charset="-120"/>
                         </a:rPr>
-                        <a:t>Chốt Voting (RF+XGB) thay Stacking</a:t>
+                        <a:t>Chốt Voting (RF+ET+XGB) thay Stacking</a:t>
                       </a:r>
                       <a:endParaRPr lang="en-US" sz="1250" dirty="0">
                         <a:latin typeface="Calibri" panose="020F0502020204030204" pitchFamily="34" charset="0"/>
@@ -18109,6 +18232,10 @@
             <a:srgbClr val="16283A"/>
           </a:solidFill>
         </p:spPr>
+        <p:txBody>
+          <a:bodyPr/>
+          <a:p/>
+        </p:txBody>
       </p:sp>
       <p:sp>
         <p:nvSpPr>
@@ -18166,6 +18293,10 @@
             <a:srgbClr val="F2A104"/>
           </a:solidFill>
         </p:spPr>
+        <p:txBody>
+          <a:bodyPr/>
+          <a:p/>
+        </p:txBody>
       </p:sp>
       <p:sp>
         <p:nvSpPr>
@@ -18272,6 +18403,10 @@
             <a:srgbClr val="F2A104"/>
           </a:solidFill>
         </p:spPr>
+        <p:txBody>
+          <a:bodyPr/>
+          <a:p/>
+        </p:txBody>
       </p:sp>
       <p:sp>
         <p:nvSpPr>
@@ -18378,6 +18513,10 @@
             <a:srgbClr val="F2A104"/>
           </a:solidFill>
         </p:spPr>
+        <p:txBody>
+          <a:bodyPr/>
+          <a:p/>
+        </p:txBody>
       </p:sp>
       <p:sp>
         <p:nvSpPr>
@@ -18484,6 +18623,10 @@
             <a:srgbClr val="F2A104"/>
           </a:solidFill>
         </p:spPr>
+        <p:txBody>
+          <a:bodyPr/>
+          <a:p/>
+        </p:txBody>
       </p:sp>
       <p:sp>
         <p:nvSpPr>
@@ -18566,7 +18709,7 @@
                 <a:ea typeface="Calibri" panose="020F0502020204030204" pitchFamily="34" charset="-122"/>
                 <a:cs typeface="Calibri" panose="020F0502020204030204" pitchFamily="34" charset="-120"/>
               </a:rPr>
-              <a:t>F1 = 0,781 trên nhà máy B, tốt gấp 3,4 lần baseline.</a:t>
+              <a:t>F1 = 0,783 trên nhà máy B, tốt gấp 3,4 lần baseline.</a:t>
             </a:r>
             <a:endParaRPr lang="en-US" sz="1700" dirty="0"/>
           </a:p>
@@ -18661,6 +18804,10 @@
             <a:srgbClr val="16283A"/>
           </a:solidFill>
         </p:spPr>
+        <p:txBody>
+          <a:bodyPr/>
+          <a:p/>
+        </p:txBody>
       </p:sp>
       <p:sp>
         <p:nvSpPr>
@@ -18816,6 +18963,10 @@
             <a:srgbClr val="16283A"/>
           </a:solidFill>
         </p:spPr>
+        <p:txBody>
+          <a:bodyPr/>
+          <a:p/>
+        </p:txBody>
       </p:sp>
       <p:sp>
         <p:nvSpPr>
@@ -18837,6 +18988,10 @@
             <a:srgbClr val="1F8A8C"/>
           </a:solidFill>
         </p:spPr>
+        <p:txBody>
+          <a:bodyPr/>
+          <a:p/>
+        </p:txBody>
       </p:sp>
       <p:sp>
         <p:nvSpPr>
@@ -19213,6 +19368,10 @@
             <a:prstDash val="solid"/>
           </a:ln>
         </p:spPr>
+        <p:txBody>
+          <a:bodyPr/>
+          <a:p/>
+        </p:txBody>
       </p:sp>
       <p:sp>
         <p:nvSpPr>
@@ -19610,6 +19769,10 @@
             <a:prstDash val="solid"/>
           </a:ln>
         </p:spPr>
+        <p:txBody>
+          <a:bodyPr/>
+          <a:p/>
+        </p:txBody>
       </p:sp>
       <p:sp>
         <p:nvSpPr>
@@ -22050,6 +22213,10 @@
             <a:prstDash val="solid"/>
           </a:ln>
         </p:spPr>
+        <p:txBody>
+          <a:bodyPr/>
+          <a:p/>
+        </p:txBody>
       </p:sp>
       <p:sp>
         <p:nvSpPr>
@@ -23049,6 +23216,10 @@
             <a:prstDash val="solid"/>
           </a:ln>
         </p:spPr>
+        <p:txBody>
+          <a:bodyPr/>
+          <a:p/>
+        </p:txBody>
       </p:sp>
       <p:pic>
         <p:nvPicPr>
@@ -23138,6 +23309,10 @@
             <a:prstDash val="solid"/>
           </a:ln>
         </p:spPr>
+        <p:txBody>
+          <a:bodyPr/>
+          <a:p/>
+        </p:txBody>
       </p:sp>
       <p:sp>
         <p:nvSpPr>
@@ -23694,6 +23869,10 @@
             <a:srgbClr val="16283A"/>
           </a:solidFill>
         </p:spPr>
+        <p:txBody>
+          <a:bodyPr/>
+          <a:p/>
+        </p:txBody>
       </p:sp>
       <p:sp>
         <p:nvSpPr>
@@ -23715,6 +23894,10 @@
             <a:srgbClr val="F2A104"/>
           </a:solidFill>
         </p:spPr>
+        <p:txBody>
+          <a:bodyPr/>
+          <a:p/>
+        </p:txBody>
       </p:sp>
       <p:sp>
         <p:nvSpPr>
@@ -23824,7 +24007,7 @@
                 <a:ea typeface="Calibri" panose="020F0502020204030204" pitchFamily="34" charset="-122"/>
                 <a:cs typeface="Calibri" panose="020F0502020204030204" pitchFamily="34" charset="-120"/>
               </a:rPr>
-              <a:t>Chuẩn hoá chống rò rỉ, 3 đặc trưng vật lý, và đo shift bằng PSI/KS + drift classifier.</a:t>
+              <a:t>Chuẩn hoá chống rò rỉ, 4 đặc trưng vật lý, và đo shift bằng PSI/KS + drift classifier.</a:t>
             </a:r>
             <a:endParaRPr lang="en-US" sz="1400" dirty="0"/>
           </a:p>
